--- a/备选资产/结构图/全链路运营框架-001/example.pptx
+++ b/备选资产/结构图/全链路运营框架-001/example.pptx
@@ -2,13 +2,13 @@
 <file path=ppt/presentation.xml><?xml version="1.0" encoding="utf-8"?>
 <p:presentation xmlns:p="http://schemas.openxmlformats.org/presentationml/2006/main">
   <p:sldMasterIdLst>
-    <p:sldMasterId xmlns:r="http://schemas.openxmlformats.org/officeDocument/2006/relationships" id="2147483648" r:id="R1ebf11c917d44dc5"/>
+    <p:sldMasterId xmlns:r="http://schemas.openxmlformats.org/officeDocument/2006/relationships" id="2147483648" r:id="Rfb8067daedff4e1b"/>
   </p:sldMasterIdLst>
   <p:notesMasterIdLst>
-    <p:notesMasterId xmlns:r="http://schemas.openxmlformats.org/officeDocument/2006/relationships" r:id="Rc530ab5031754763"/>
+    <p:notesMasterId xmlns:r="http://schemas.openxmlformats.org/officeDocument/2006/relationships" r:id="Rf67e70da68d0414d"/>
   </p:notesMasterIdLst>
   <p:sldIdLst>
-    <p:sldId xmlns:r="http://schemas.openxmlformats.org/officeDocument/2006/relationships" id="256" r:id="Rc95a388d3d714034"/>
+    <p:sldId xmlns:r="http://schemas.openxmlformats.org/officeDocument/2006/relationships" id="256" r:id="R5e4d6172a6384f28"/>
   </p:sldIdLst>
   <p:sldSz cx="12192000" cy="6858000"/>
   <p:notesSz cx="6858000" cy="9144000"/>
@@ -506,7 +506,7 @@
   </p:cSld>
   <p:clrMap bg1="lt1" tx1="dk1" bg2="lt2" tx2="dk2" accent1="accent1" accent2="accent2" accent3="accent3" accent4="accent4" accent5="accent5" accent6="accent6" hlink="hlink" folHlink="folHlink"/>
   <p:sldLayoutIdLst>
-    <p:sldLayoutId xmlns:r="http://schemas.openxmlformats.org/officeDocument/2006/relationships" id="2147483649" r:id="Rdae2eb747a124868"/>
+    <p:sldLayoutId xmlns:r="http://schemas.openxmlformats.org/officeDocument/2006/relationships" id="2147483649" r:id="R88d3514ce3644050"/>
   </p:sldLayoutIdLst>
   <p:txStyles>
     <p:titleStyle>
@@ -1054,10 +1054,10 @@
       </p:grpSpPr>
       <p:sp>
         <p:nvSpPr>
-          <p:cNvPr id="29" name="">
-            <a:extLst xmlns:a="http://schemas.openxmlformats.org/drawingml/2006/main">
-              <a:ext uri="{FF2B5EF4-FFF2-40B4-BE49-F238E27FC236}">
-                <a16:creationId xmlns:a16="http://schemas.microsoft.com/office/drawing/2014/main" id="{5133AA4D-6981-4717-8FE8-B926CF506BE9}"/>
+          <p:cNvPr id="41" name="">
+            <a:extLst xmlns:a="http://schemas.openxmlformats.org/drawingml/2006/main">
+              <a:ext uri="{FF2B5EF4-FFF2-40B4-BE49-F238E27FC236}">
+                <a16:creationId xmlns:a16="http://schemas.microsoft.com/office/drawing/2014/main" id="{D7EF7749-8513-4590-A981-9F54A2D0463B}"/>
               </a:ext>
             </a:extLst>
           </p:cNvPr>
@@ -1115,7 +1115,7 @@
           <p:cNvPr id="2" name="">
             <a:extLst xmlns:a="http://schemas.openxmlformats.org/drawingml/2006/main">
               <a:ext uri="{FF2B5EF4-FFF2-40B4-BE49-F238E27FC236}">
-                <a16:creationId xmlns:a16="http://schemas.microsoft.com/office/drawing/2014/main" id="{88DC11C0-A7CB-41B1-B332-D3279BE7B793}"/>
+                <a16:creationId xmlns:a16="http://schemas.microsoft.com/office/drawing/2014/main" id="{E614869F-3E14-4E45-AEB1-F997495B1CF9}"/>
               </a:ext>
             </a:extLst>
           </p:cNvPr>
@@ -1170,22 +1170,22 @@
       </p:sp>
       <p:sp>
         <p:nvSpPr>
-          <p:cNvPr id="3" name="">
-            <a:extLst xmlns:a="http://schemas.openxmlformats.org/drawingml/2006/main">
-              <a:ext uri="{FF2B5EF4-FFF2-40B4-BE49-F238E27FC236}">
-                <a16:creationId xmlns:a16="http://schemas.microsoft.com/office/drawing/2014/main" id="{D9FD0DB0-B5FE-4CF2-8BAE-318A3FD9EB50}"/>
-              </a:ext>
-            </a:extLst>
-          </p:cNvPr>
-          <p:cNvSpPr>
-            <a:spLocks xmlns:a="http://schemas.openxmlformats.org/drawingml/2006/main" noGrp="1"/>
-          </p:cNvSpPr>
-          <p:nvPr/>
-        </p:nvSpPr>
-        <p:spPr>
-          <a:xfrm xmlns:a="http://schemas.openxmlformats.org/drawingml/2006/main">
-            <a:off x="571500" y="1352550"/>
-            <a:ext cx="11049000" cy="2724150"/>
+          <p:cNvPr id="3" name="PPAGENT_QA|parent=operations-platform|domains=operations-platform">
+            <a:extLst xmlns:a="http://schemas.openxmlformats.org/drawingml/2006/main">
+              <a:ext uri="{FF2B5EF4-FFF2-40B4-BE49-F238E27FC236}">
+                <a16:creationId xmlns:a16="http://schemas.microsoft.com/office/drawing/2014/main" id="{1CADB1F4-D0D8-421F-AAFF-95933FDD5AC2}"/>
+              </a:ext>
+            </a:extLst>
+          </p:cNvPr>
+          <p:cNvSpPr>
+            <a:spLocks xmlns:a="http://schemas.openxmlformats.org/drawingml/2006/main" noGrp="1"/>
+          </p:cNvSpPr>
+          <p:nvPr/>
+        </p:nvSpPr>
+        <p:spPr>
+          <a:xfrm xmlns:a="http://schemas.openxmlformats.org/drawingml/2006/main">
+            <a:off x="666750" y="1333500"/>
+            <a:ext cx="10858500" cy="2724150"/>
           </a:xfrm>
           <a:prstGeom xmlns:a="http://schemas.openxmlformats.org/drawingml/2006/main" prst="roundRect">
             <a:avLst>
@@ -1197,7 +1197,331 @@
           </a:solidFill>
           <a:ln xmlns:a="http://schemas.openxmlformats.org/drawingml/2006/main" w="14288">
             <a:solidFill>
-              <a:srgbClr val="C9D5E3"/>
+              <a:srgbClr val="C9D8E6"/>
+            </a:solidFill>
+            <a:prstDash val="solid"/>
+          </a:ln>
+        </p:spPr>
+        <p:style>
+          <a:lnRef xmlns:a="http://schemas.openxmlformats.org/drawingml/2006/main" idx="0"/>
+          <a:fillRef xmlns:a="http://schemas.openxmlformats.org/drawingml/2006/main" idx="0"/>
+          <a:effectRef xmlns:a="http://schemas.openxmlformats.org/drawingml/2006/main" idx="6"/>
+          <a:fontRef xmlns:a="http://schemas.openxmlformats.org/drawingml/2006/main" idx="major"/>
+        </p:style>
+      </p:sp>
+      <p:sp>
+        <p:nvSpPr>
+          <p:cNvPr id="4" name="">
+            <a:extLst xmlns:a="http://schemas.openxmlformats.org/drawingml/2006/main">
+              <a:ext uri="{FF2B5EF4-FFF2-40B4-BE49-F238E27FC236}">
+                <a16:creationId xmlns:a16="http://schemas.microsoft.com/office/drawing/2014/main" id="{2C5C6735-187F-42C1-8CB3-CD60E3218B30}"/>
+              </a:ext>
+            </a:extLst>
+          </p:cNvPr>
+          <p:cNvSpPr>
+            <a:spLocks xmlns:a="http://schemas.openxmlformats.org/drawingml/2006/main" noGrp="1"/>
+          </p:cNvSpPr>
+          <p:nvPr/>
+        </p:nvSpPr>
+        <p:spPr>
+          <a:xfrm xmlns:a="http://schemas.openxmlformats.org/drawingml/2006/main">
+            <a:off x="1143000" y="1466850"/>
+            <a:ext cx="3359150" cy="476250"/>
+          </a:xfrm>
+          <a:prstGeom xmlns:a="http://schemas.openxmlformats.org/drawingml/2006/main" prst="chevron">
+            <a:avLst/>
+          </a:prstGeom>
+          <a:solidFill xmlns:a="http://schemas.openxmlformats.org/drawingml/2006/main">
+            <a:srgbClr val="33488C"/>
+          </a:solidFill>
+          <a:ln xmlns:a="http://schemas.openxmlformats.org/drawingml/2006/main" w="9525">
+            <a:solidFill>
+              <a:srgbClr val="FFFFFF"/>
+            </a:solidFill>
+            <a:prstDash val="solid"/>
+          </a:ln>
+        </p:spPr>
+        <p:txBody>
+          <a:bodyPr xmlns:a="http://schemas.openxmlformats.org/drawingml/2006/main" lIns="114300" tIns="76200" rIns="114300" bIns="76200" anchor="ctr">
+            <a:normAutofit fontScale="100000"/>
+          </a:bodyPr>
+          <a:lstStyle xmlns:a="http://schemas.openxmlformats.org/drawingml/2006/main"/>
+          <a:p xmlns:a="http://schemas.openxmlformats.org/drawingml/2006/main">
+            <a:pPr algn="ctr">
+              <a:defRPr sz="1350" b="1">
+                <a:solidFill>
+                  <a:srgbClr val="FFFFFF"/>
+                </a:solidFill>
+                <a:latin typeface="Microsoft YaHei"/>
+                <a:ea typeface="Microsoft YaHei"/>
+                <a:cs typeface="Microsoft YaHei"/>
+              </a:defRPr>
+            </a:pPr>
+            <a:r>
+              <a:rPr sz="1350" b="1">
+                <a:solidFill>
+                  <a:srgbClr val="FFFFFF"/>
+                </a:solidFill>
+                <a:latin typeface="Microsoft YaHei"/>
+                <a:ea typeface="Microsoft YaHei"/>
+                <a:cs typeface="Microsoft YaHei"/>
+              </a:rPr>
+              <a:t>采购</a:t>
+            </a:r>
+          </a:p>
+        </p:txBody>
+      </p:sp>
+      <p:sp>
+        <p:nvSpPr>
+          <p:cNvPr id="5" name="">
+            <a:extLst xmlns:a="http://schemas.openxmlformats.org/drawingml/2006/main">
+              <a:ext uri="{FF2B5EF4-FFF2-40B4-BE49-F238E27FC236}">
+                <a16:creationId xmlns:a16="http://schemas.microsoft.com/office/drawing/2014/main" id="{46AB8F98-FE54-4C4E-B007-7ACFF84BC150}"/>
+              </a:ext>
+            </a:extLst>
+          </p:cNvPr>
+          <p:cNvSpPr>
+            <a:spLocks xmlns:a="http://schemas.openxmlformats.org/drawingml/2006/main" noGrp="1"/>
+          </p:cNvSpPr>
+          <p:nvPr/>
+        </p:nvSpPr>
+        <p:spPr>
+          <a:xfrm xmlns:a="http://schemas.openxmlformats.org/drawingml/2006/main">
+            <a:off x="4445000" y="1466850"/>
+            <a:ext cx="3359150" cy="476250"/>
+          </a:xfrm>
+          <a:prstGeom xmlns:a="http://schemas.openxmlformats.org/drawingml/2006/main" prst="chevron">
+            <a:avLst/>
+          </a:prstGeom>
+          <a:solidFill xmlns:a="http://schemas.openxmlformats.org/drawingml/2006/main">
+            <a:srgbClr val="3E3E3E"/>
+          </a:solidFill>
+          <a:ln xmlns:a="http://schemas.openxmlformats.org/drawingml/2006/main" w="9525">
+            <a:solidFill>
+              <a:srgbClr val="FFFFFF"/>
+            </a:solidFill>
+            <a:prstDash val="solid"/>
+          </a:ln>
+        </p:spPr>
+        <p:txBody>
+          <a:bodyPr xmlns:a="http://schemas.openxmlformats.org/drawingml/2006/main" lIns="114300" tIns="76200" rIns="114300" bIns="76200" anchor="ctr">
+            <a:normAutofit fontScale="100000"/>
+          </a:bodyPr>
+          <a:lstStyle xmlns:a="http://schemas.openxmlformats.org/drawingml/2006/main"/>
+          <a:p xmlns:a="http://schemas.openxmlformats.org/drawingml/2006/main">
+            <a:pPr algn="ctr">
+              <a:defRPr sz="1350" b="1">
+                <a:solidFill>
+                  <a:srgbClr val="FFFFFF"/>
+                </a:solidFill>
+                <a:latin typeface="Microsoft YaHei"/>
+                <a:ea typeface="Microsoft YaHei"/>
+                <a:cs typeface="Microsoft YaHei"/>
+              </a:defRPr>
+            </a:pPr>
+            <a:r>
+              <a:rPr sz="1350" b="1">
+                <a:solidFill>
+                  <a:srgbClr val="FFFFFF"/>
+                </a:solidFill>
+                <a:latin typeface="Microsoft YaHei"/>
+                <a:ea typeface="Microsoft YaHei"/>
+                <a:cs typeface="Microsoft YaHei"/>
+              </a:rPr>
+              <a:t>制造</a:t>
+            </a:r>
+          </a:p>
+        </p:txBody>
+      </p:sp>
+      <p:sp>
+        <p:nvSpPr>
+          <p:cNvPr id="6" name="">
+            <a:extLst xmlns:a="http://schemas.openxmlformats.org/drawingml/2006/main">
+              <a:ext uri="{FF2B5EF4-FFF2-40B4-BE49-F238E27FC236}">
+                <a16:creationId xmlns:a16="http://schemas.microsoft.com/office/drawing/2014/main" id="{F1523C25-F758-4FA1-93F2-CB8DDBA0E102}"/>
+              </a:ext>
+            </a:extLst>
+          </p:cNvPr>
+          <p:cNvSpPr>
+            <a:spLocks xmlns:a="http://schemas.openxmlformats.org/drawingml/2006/main" noGrp="1"/>
+          </p:cNvSpPr>
+          <p:nvPr/>
+        </p:nvSpPr>
+        <p:spPr>
+          <a:xfrm xmlns:a="http://schemas.openxmlformats.org/drawingml/2006/main">
+            <a:off x="7747000" y="1466850"/>
+            <a:ext cx="3302000" cy="476250"/>
+          </a:xfrm>
+          <a:prstGeom xmlns:a="http://schemas.openxmlformats.org/drawingml/2006/main" prst="roundRect">
+            <a:avLst>
+              <a:gd name="adj" fmla="val 24000"/>
+            </a:avLst>
+          </a:prstGeom>
+          <a:solidFill xmlns:a="http://schemas.openxmlformats.org/drawingml/2006/main">
+            <a:srgbClr val="5D9BD3"/>
+          </a:solidFill>
+          <a:ln xmlns:a="http://schemas.openxmlformats.org/drawingml/2006/main" w="9525">
+            <a:solidFill>
+              <a:srgbClr val="FFFFFF"/>
+            </a:solidFill>
+            <a:prstDash val="solid"/>
+          </a:ln>
+        </p:spPr>
+        <p:txBody>
+          <a:bodyPr xmlns:a="http://schemas.openxmlformats.org/drawingml/2006/main" lIns="114300" tIns="76200" rIns="114300" bIns="76200" anchor="ctr">
+            <a:normAutofit fontScale="100000"/>
+          </a:bodyPr>
+          <a:lstStyle xmlns:a="http://schemas.openxmlformats.org/drawingml/2006/main"/>
+          <a:p xmlns:a="http://schemas.openxmlformats.org/drawingml/2006/main">
+            <a:pPr algn="ctr">
+              <a:defRPr sz="1350" b="1">
+                <a:solidFill>
+                  <a:srgbClr val="FFFFFF"/>
+                </a:solidFill>
+                <a:latin typeface="Microsoft YaHei"/>
+                <a:ea typeface="Microsoft YaHei"/>
+                <a:cs typeface="Microsoft YaHei"/>
+              </a:defRPr>
+            </a:pPr>
+            <a:r>
+              <a:rPr sz="1350" b="1">
+                <a:solidFill>
+                  <a:srgbClr val="FFFFFF"/>
+                </a:solidFill>
+                <a:latin typeface="Microsoft YaHei"/>
+                <a:ea typeface="Microsoft YaHei"/>
+                <a:cs typeface="Microsoft YaHei"/>
+              </a:rPr>
+              <a:t>仓储</a:t>
+            </a:r>
+          </a:p>
+        </p:txBody>
+      </p:sp>
+      <p:sp>
+        <p:nvSpPr>
+          <p:cNvPr id="7" name="">
+            <a:extLst xmlns:a="http://schemas.openxmlformats.org/drawingml/2006/main">
+              <a:ext uri="{FF2B5EF4-FFF2-40B4-BE49-F238E27FC236}">
+                <a16:creationId xmlns:a16="http://schemas.microsoft.com/office/drawing/2014/main" id="{44EB6950-2259-4ABE-AE61-F67628FC9D53}"/>
+              </a:ext>
+            </a:extLst>
+          </p:cNvPr>
+          <p:cNvSpPr>
+            <a:spLocks xmlns:a="http://schemas.openxmlformats.org/drawingml/2006/main" noGrp="1"/>
+          </p:cNvSpPr>
+          <p:nvPr/>
+        </p:nvSpPr>
+        <p:spPr>
+          <a:xfrm xmlns:a="http://schemas.openxmlformats.org/drawingml/2006/main">
+            <a:off x="2857500" y="2095500"/>
+            <a:ext cx="6477000" cy="457200"/>
+          </a:xfrm>
+          <a:prstGeom xmlns:a="http://schemas.openxmlformats.org/drawingml/2006/main" prst="rect">
+            <a:avLst/>
+          </a:prstGeom>
+          <a:noFill xmlns:a="http://schemas.openxmlformats.org/drawingml/2006/main"/>
+          <a:ln xmlns:a="http://schemas.openxmlformats.org/drawingml/2006/main" w="0">
+            <a:noFill/>
+            <a:prstDash val="solid"/>
+          </a:ln>
+        </p:spPr>
+        <p:txBody>
+          <a:bodyPr xmlns:a="http://schemas.openxmlformats.org/drawingml/2006/main" lIns="0" tIns="0" rIns="0" bIns="0" anchor="ctr">
+            <a:normAutofit fontScale="100000"/>
+          </a:bodyPr>
+          <a:lstStyle xmlns:a="http://schemas.openxmlformats.org/drawingml/2006/main"/>
+          <a:p xmlns:a="http://schemas.openxmlformats.org/drawingml/2006/main">
+            <a:pPr algn="ctr">
+              <a:defRPr sz="1950" b="1">
+                <a:solidFill>
+                  <a:srgbClr val="1677C8"/>
+                </a:solidFill>
+                <a:latin typeface="Microsoft YaHei"/>
+                <a:ea typeface="Microsoft YaHei"/>
+                <a:cs typeface="Microsoft YaHei"/>
+              </a:defRPr>
+            </a:pPr>
+            <a:r>
+              <a:rPr sz="1950" b="1">
+                <a:solidFill>
+                  <a:srgbClr val="1677C8"/>
+                </a:solidFill>
+                <a:latin typeface="Microsoft YaHei"/>
+                <a:ea typeface="Microsoft YaHei"/>
+                <a:cs typeface="Microsoft YaHei"/>
+              </a:rPr>
+              <a:t>一站式全链路运营平台</a:t>
+            </a:r>
+          </a:p>
+        </p:txBody>
+      </p:sp>
+      <p:sp>
+        <p:nvSpPr>
+          <p:cNvPr id="8" name="">
+            <a:extLst xmlns:a="http://schemas.openxmlformats.org/drawingml/2006/main">
+              <a:ext uri="{FF2B5EF4-FFF2-40B4-BE49-F238E27FC236}">
+                <a16:creationId xmlns:a16="http://schemas.microsoft.com/office/drawing/2014/main" id="{F6055A81-FB29-4C82-B268-ABC6AEDA3B60}"/>
+              </a:ext>
+            </a:extLst>
+          </p:cNvPr>
+          <p:cNvSpPr>
+            <a:spLocks xmlns:a="http://schemas.openxmlformats.org/drawingml/2006/main" noGrp="1"/>
+          </p:cNvSpPr>
+          <p:nvPr/>
+        </p:nvSpPr>
+        <p:spPr>
+          <a:xfrm xmlns:a="http://schemas.openxmlformats.org/drawingml/2006/main" flipH="0" flipV="0">
+            <a:off x="2095500" y="3143250"/>
+            <a:ext cx="8001000" cy="0"/>
+          </a:xfrm>
+          <a:prstGeom xmlns:a="http://schemas.openxmlformats.org/drawingml/2006/main" prst="line">
+            <a:avLst/>
+          </a:prstGeom>
+          <a:noFill xmlns:a="http://schemas.openxmlformats.org/drawingml/2006/main"/>
+          <a:ln xmlns:a="http://schemas.openxmlformats.org/drawingml/2006/main" w="28575">
+            <a:solidFill>
+              <a:srgbClr val="C8D7E5"/>
+            </a:solidFill>
+            <a:prstDash val="solid"/>
+          </a:ln>
+        </p:spPr>
+      </p:sp>
+      <p:sp>
+        <p:nvSpPr>
+          <p:cNvPr id="9" name="PPAGENT_QA|parent=operations-node-0|domains=operations-nodes">
+            <a:extLst xmlns:a="http://schemas.openxmlformats.org/drawingml/2006/main">
+              <a:ext uri="{FF2B5EF4-FFF2-40B4-BE49-F238E27FC236}">
+                <a16:creationId xmlns:a16="http://schemas.microsoft.com/office/drawing/2014/main" id="{D4CE13B6-4CE7-4F88-9D9A-BB677B083266}"/>
+              </a:ext>
+            </a:extLst>
+          </p:cNvPr>
+          <p:cNvSpPr>
+            <a:spLocks xmlns:a="http://schemas.openxmlformats.org/drawingml/2006/main" noGrp="1"/>
+          </p:cNvSpPr>
+          <p:nvPr/>
+        </p:nvSpPr>
+        <p:spPr>
+          <a:xfrm xmlns:a="http://schemas.openxmlformats.org/drawingml/2006/main">
+            <a:off x="1714500" y="2762250"/>
+            <a:ext cx="762000" cy="762000"/>
+          </a:xfrm>
+          <a:prstGeom xmlns:a="http://schemas.openxmlformats.org/drawingml/2006/main" prst="ellipse">
+            <a:avLst/>
+          </a:prstGeom>
+          <a:gradFill xmlns:a="http://schemas.openxmlformats.org/drawingml/2006/main">
+            <a:gsLst>
+              <a:gs pos="0">
+                <a:srgbClr val="FFFFFF"/>
+              </a:gs>
+              <a:gs pos="100000">
+                <a:srgbClr val="EEF2F6"/>
+              </a:gs>
+            </a:gsLst>
+            <a:lin ang="10800000"/>
+          </a:gradFill>
+          <a:ln xmlns:a="http://schemas.openxmlformats.org/drawingml/2006/main" w="14288">
+            <a:solidFill>
+              <a:srgbClr val="D1DBE5"/>
             </a:solidFill>
             <a:prstDash val="solid"/>
           </a:ln>
@@ -1208,80 +1532,16 @@
           <a:effectRef xmlns:a="http://schemas.openxmlformats.org/drawingml/2006/main" idx="4"/>
           <a:fontRef xmlns:a="http://schemas.openxmlformats.org/drawingml/2006/main" idx="major"/>
         </p:style>
-      </p:sp>
-      <p:sp>
-        <p:nvSpPr>
-          <p:cNvPr id="4" name="">
-            <a:extLst xmlns:a="http://schemas.openxmlformats.org/drawingml/2006/main">
-              <a:ext uri="{FF2B5EF4-FFF2-40B4-BE49-F238E27FC236}">
-                <a16:creationId xmlns:a16="http://schemas.microsoft.com/office/drawing/2014/main" id="{1F24FFF3-C86A-4E81-A3BA-83E861AD0914}"/>
-              </a:ext>
-            </a:extLst>
-          </p:cNvPr>
-          <p:cNvSpPr>
-            <a:spLocks xmlns:a="http://schemas.openxmlformats.org/drawingml/2006/main" noGrp="1"/>
-          </p:cNvSpPr>
-          <p:nvPr/>
-        </p:nvSpPr>
-        <p:spPr>
-          <a:xfrm xmlns:a="http://schemas.openxmlformats.org/drawingml/2006/main">
-            <a:off x="1381125" y="3028950"/>
-            <a:ext cx="9429750" cy="0"/>
-          </a:xfrm>
-          <a:prstGeom xmlns:a="http://schemas.openxmlformats.org/drawingml/2006/main" prst="line">
-            <a:avLst/>
-          </a:prstGeom>
-          <a:noFill xmlns:a="http://schemas.openxmlformats.org/drawingml/2006/main"/>
-          <a:ln xmlns:a="http://schemas.openxmlformats.org/drawingml/2006/main" w="76200">
-            <a:solidFill>
-              <a:srgbClr val="DCEEFF"/>
-            </a:solidFill>
-            <a:prstDash val="solid"/>
-          </a:ln>
-        </p:spPr>
-      </p:sp>
-      <p:sp>
-        <p:nvSpPr>
-          <p:cNvPr id="5" name="">
-            <a:extLst xmlns:a="http://schemas.openxmlformats.org/drawingml/2006/main">
-              <a:ext uri="{FF2B5EF4-FFF2-40B4-BE49-F238E27FC236}">
-                <a16:creationId xmlns:a16="http://schemas.microsoft.com/office/drawing/2014/main" id="{D94A8F1F-4204-49E0-AE97-98AA1C32C688}"/>
-              </a:ext>
-            </a:extLst>
-          </p:cNvPr>
-          <p:cNvSpPr>
-            <a:spLocks xmlns:a="http://schemas.openxmlformats.org/drawingml/2006/main" noGrp="1"/>
-          </p:cNvSpPr>
-          <p:nvPr/>
-        </p:nvSpPr>
-        <p:spPr>
-          <a:xfrm xmlns:a="http://schemas.openxmlformats.org/drawingml/2006/main">
-            <a:off x="1190625" y="1485900"/>
-            <a:ext cx="3194050" cy="495300"/>
-          </a:xfrm>
-          <a:prstGeom xmlns:a="http://schemas.openxmlformats.org/drawingml/2006/main" prst="chevron">
-            <a:avLst/>
-          </a:prstGeom>
-          <a:solidFill xmlns:a="http://schemas.openxmlformats.org/drawingml/2006/main">
-            <a:srgbClr val="1677C8"/>
-          </a:solidFill>
-          <a:ln xmlns:a="http://schemas.openxmlformats.org/drawingml/2006/main" w="9525">
-            <a:solidFill>
-              <a:srgbClr val="FFFFFF"/>
-            </a:solidFill>
-            <a:prstDash val="solid"/>
-          </a:ln>
-        </p:spPr>
-        <p:txBody>
-          <a:bodyPr xmlns:a="http://schemas.openxmlformats.org/drawingml/2006/main" lIns="114300" tIns="76200" rIns="114300" bIns="76200" anchor="ctr">
+        <p:txBody>
+          <a:bodyPr xmlns:a="http://schemas.openxmlformats.org/drawingml/2006/main" lIns="47625" tIns="38100" rIns="47625" bIns="38100" anchor="ctr">
             <a:normAutofit fontScale="100000"/>
           </a:bodyPr>
           <a:lstStyle xmlns:a="http://schemas.openxmlformats.org/drawingml/2006/main"/>
           <a:p xmlns:a="http://schemas.openxmlformats.org/drawingml/2006/main">
             <a:pPr algn="ctr">
-              <a:defRPr sz="1350" b="1">
-                <a:solidFill>
-                  <a:srgbClr val="FFFFFF"/>
+              <a:defRPr sz="1200" b="1">
+                <a:solidFill>
+                  <a:srgbClr val="1677C8"/>
                 </a:solidFill>
                 <a:latin typeface="Microsoft YaHei"/>
                 <a:ea typeface="Microsoft YaHei"/>
@@ -1289,231 +1549,55 @@
               </a:defRPr>
             </a:pPr>
             <a:r>
-              <a:rPr sz="1350" b="1">
-                <a:solidFill>
-                  <a:srgbClr val="FFFFFF"/>
+              <a:rPr sz="1200" b="1">
+                <a:solidFill>
+                  <a:srgbClr val="1677C8"/>
                 </a:solidFill>
                 <a:latin typeface="Microsoft YaHei"/>
                 <a:ea typeface="Microsoft YaHei"/>
                 <a:cs typeface="Microsoft YaHei"/>
               </a:rPr>
-              <a:t>采购</a:t>
+              <a:t>需求</a:t>
             </a:r>
           </a:p>
         </p:txBody>
       </p:sp>
       <p:sp>
         <p:nvSpPr>
-          <p:cNvPr id="6" name="">
-            <a:extLst xmlns:a="http://schemas.openxmlformats.org/drawingml/2006/main">
-              <a:ext uri="{FF2B5EF4-FFF2-40B4-BE49-F238E27FC236}">
-                <a16:creationId xmlns:a16="http://schemas.microsoft.com/office/drawing/2014/main" id="{F2802431-1C81-4F5B-922A-F41366EC176B}"/>
-              </a:ext>
-            </a:extLst>
-          </p:cNvPr>
-          <p:cNvSpPr>
-            <a:spLocks xmlns:a="http://schemas.openxmlformats.org/drawingml/2006/main" noGrp="1"/>
-          </p:cNvSpPr>
-          <p:nvPr/>
-        </p:nvSpPr>
-        <p:spPr>
-          <a:xfrm xmlns:a="http://schemas.openxmlformats.org/drawingml/2006/main">
-            <a:off x="4460875" y="1485900"/>
-            <a:ext cx="3194050" cy="495300"/>
-          </a:xfrm>
-          <a:prstGeom xmlns:a="http://schemas.openxmlformats.org/drawingml/2006/main" prst="chevron">
-            <a:avLst/>
-          </a:prstGeom>
-          <a:solidFill xmlns:a="http://schemas.openxmlformats.org/drawingml/2006/main">
-            <a:srgbClr val="315172"/>
-          </a:solidFill>
-          <a:ln xmlns:a="http://schemas.openxmlformats.org/drawingml/2006/main" w="9525">
-            <a:solidFill>
-              <a:srgbClr val="FFFFFF"/>
-            </a:solidFill>
-            <a:prstDash val="solid"/>
-          </a:ln>
-        </p:spPr>
-        <p:txBody>
-          <a:bodyPr xmlns:a="http://schemas.openxmlformats.org/drawingml/2006/main" lIns="114300" tIns="76200" rIns="114300" bIns="76200" anchor="ctr">
-            <a:normAutofit fontScale="100000"/>
-          </a:bodyPr>
-          <a:lstStyle xmlns:a="http://schemas.openxmlformats.org/drawingml/2006/main"/>
-          <a:p xmlns:a="http://schemas.openxmlformats.org/drawingml/2006/main">
-            <a:pPr algn="ctr">
-              <a:defRPr sz="1350" b="1">
-                <a:solidFill>
-                  <a:srgbClr val="FFFFFF"/>
-                </a:solidFill>
-                <a:latin typeface="Microsoft YaHei"/>
-                <a:ea typeface="Microsoft YaHei"/>
-                <a:cs typeface="Microsoft YaHei"/>
-              </a:defRPr>
-            </a:pPr>
-            <a:r>
-              <a:rPr sz="1350" b="1">
-                <a:solidFill>
-                  <a:srgbClr val="FFFFFF"/>
-                </a:solidFill>
-                <a:latin typeface="Microsoft YaHei"/>
-                <a:ea typeface="Microsoft YaHei"/>
-                <a:cs typeface="Microsoft YaHei"/>
-              </a:rPr>
-              <a:t>制造</a:t>
-            </a:r>
-          </a:p>
-        </p:txBody>
-      </p:sp>
-      <p:sp>
-        <p:nvSpPr>
-          <p:cNvPr id="7" name="">
-            <a:extLst xmlns:a="http://schemas.openxmlformats.org/drawingml/2006/main">
-              <a:ext uri="{FF2B5EF4-FFF2-40B4-BE49-F238E27FC236}">
-                <a16:creationId xmlns:a16="http://schemas.microsoft.com/office/drawing/2014/main" id="{BF437667-2248-4A94-BB06-7583F9C69757}"/>
-              </a:ext>
-            </a:extLst>
-          </p:cNvPr>
-          <p:cNvSpPr>
-            <a:spLocks xmlns:a="http://schemas.openxmlformats.org/drawingml/2006/main" noGrp="1"/>
-          </p:cNvSpPr>
-          <p:nvPr/>
-        </p:nvSpPr>
-        <p:spPr>
-          <a:xfrm xmlns:a="http://schemas.openxmlformats.org/drawingml/2006/main">
-            <a:off x="7731125" y="1485900"/>
-            <a:ext cx="3194050" cy="495300"/>
-          </a:xfrm>
-          <a:prstGeom xmlns:a="http://schemas.openxmlformats.org/drawingml/2006/main" prst="roundRect">
-            <a:avLst>
-              <a:gd name="adj" fmla="val 23077"/>
-            </a:avLst>
-          </a:prstGeom>
-          <a:solidFill xmlns:a="http://schemas.openxmlformats.org/drawingml/2006/main">
-            <a:srgbClr val="1677C8"/>
-          </a:solidFill>
-          <a:ln xmlns:a="http://schemas.openxmlformats.org/drawingml/2006/main" w="9525">
-            <a:solidFill>
-              <a:srgbClr val="FFFFFF"/>
-            </a:solidFill>
-            <a:prstDash val="solid"/>
-          </a:ln>
-        </p:spPr>
-        <p:txBody>
-          <a:bodyPr xmlns:a="http://schemas.openxmlformats.org/drawingml/2006/main" lIns="114300" tIns="76200" rIns="114300" bIns="76200" anchor="ctr">
-            <a:normAutofit fontScale="100000"/>
-          </a:bodyPr>
-          <a:lstStyle xmlns:a="http://schemas.openxmlformats.org/drawingml/2006/main"/>
-          <a:p xmlns:a="http://schemas.openxmlformats.org/drawingml/2006/main">
-            <a:pPr algn="ctr">
-              <a:defRPr sz="1350" b="1">
-                <a:solidFill>
-                  <a:srgbClr val="FFFFFF"/>
-                </a:solidFill>
-                <a:latin typeface="Microsoft YaHei"/>
-                <a:ea typeface="Microsoft YaHei"/>
-                <a:cs typeface="Microsoft YaHei"/>
-              </a:defRPr>
-            </a:pPr>
-            <a:r>
-              <a:rPr sz="1350" b="1">
-                <a:solidFill>
-                  <a:srgbClr val="FFFFFF"/>
-                </a:solidFill>
-                <a:latin typeface="Microsoft YaHei"/>
-                <a:ea typeface="Microsoft YaHei"/>
-                <a:cs typeface="Microsoft YaHei"/>
-              </a:rPr>
-              <a:t>仓储</a:t>
-            </a:r>
-          </a:p>
-        </p:txBody>
-      </p:sp>
-      <p:sp>
-        <p:nvSpPr>
-          <p:cNvPr id="8" name="">
-            <a:extLst xmlns:a="http://schemas.openxmlformats.org/drawingml/2006/main">
-              <a:ext uri="{FF2B5EF4-FFF2-40B4-BE49-F238E27FC236}">
-                <a16:creationId xmlns:a16="http://schemas.microsoft.com/office/drawing/2014/main" id="{6F7876DB-1A9F-4B77-9A28-E6159D01608B}"/>
-              </a:ext>
-            </a:extLst>
-          </p:cNvPr>
-          <p:cNvSpPr>
-            <a:spLocks xmlns:a="http://schemas.openxmlformats.org/drawingml/2006/main" noGrp="1"/>
-          </p:cNvSpPr>
-          <p:nvPr/>
-        </p:nvSpPr>
-        <p:spPr>
-          <a:xfrm xmlns:a="http://schemas.openxmlformats.org/drawingml/2006/main">
-            <a:off x="3238500" y="2133600"/>
-            <a:ext cx="5715000" cy="457200"/>
-          </a:xfrm>
-          <a:prstGeom xmlns:a="http://schemas.openxmlformats.org/drawingml/2006/main" prst="rect">
-            <a:avLst/>
-          </a:prstGeom>
-          <a:noFill xmlns:a="http://schemas.openxmlformats.org/drawingml/2006/main"/>
-          <a:ln xmlns:a="http://schemas.openxmlformats.org/drawingml/2006/main" w="0">
-            <a:noFill/>
-            <a:prstDash val="solid"/>
-          </a:ln>
-        </p:spPr>
-        <p:txBody>
-          <a:bodyPr xmlns:a="http://schemas.openxmlformats.org/drawingml/2006/main" lIns="0" tIns="0" rIns="0" bIns="0" anchor="ctr">
-            <a:normAutofit fontScale="100000"/>
-          </a:bodyPr>
-          <a:lstStyle xmlns:a="http://schemas.openxmlformats.org/drawingml/2006/main"/>
-          <a:p xmlns:a="http://schemas.openxmlformats.org/drawingml/2006/main">
-            <a:pPr algn="ctr">
-              <a:defRPr sz="2100" b="1">
-                <a:solidFill>
-                  <a:srgbClr val="1677C8"/>
-                </a:solidFill>
-                <a:latin typeface="Microsoft YaHei"/>
-                <a:ea typeface="Microsoft YaHei"/>
-                <a:cs typeface="Microsoft YaHei"/>
-              </a:defRPr>
-            </a:pPr>
-            <a:r>
-              <a:rPr sz="2100" b="1">
-                <a:solidFill>
-                  <a:srgbClr val="1677C8"/>
-                </a:solidFill>
-                <a:latin typeface="Microsoft YaHei"/>
-                <a:ea typeface="Microsoft YaHei"/>
-                <a:cs typeface="Microsoft YaHei"/>
-              </a:rPr>
-              <a:t>一站式全链路运营平台</a:t>
-            </a:r>
-          </a:p>
-        </p:txBody>
-      </p:sp>
-      <p:sp>
-        <p:nvSpPr>
-          <p:cNvPr id="9" name="">
-            <a:extLst xmlns:a="http://schemas.openxmlformats.org/drawingml/2006/main">
-              <a:ext uri="{FF2B5EF4-FFF2-40B4-BE49-F238E27FC236}">
-                <a16:creationId xmlns:a16="http://schemas.microsoft.com/office/drawing/2014/main" id="{BC8111CC-5E0D-4DBD-ADFD-3026A76C8824}"/>
-              </a:ext>
-            </a:extLst>
-          </p:cNvPr>
-          <p:cNvSpPr>
-            <a:spLocks xmlns:a="http://schemas.openxmlformats.org/drawingml/2006/main" noGrp="1"/>
-          </p:cNvSpPr>
-          <p:nvPr/>
-        </p:nvSpPr>
-        <p:spPr>
-          <a:xfrm xmlns:a="http://schemas.openxmlformats.org/drawingml/2006/main">
-            <a:off x="1952625" y="2724150"/>
-            <a:ext cx="723900" cy="723900"/>
+          <p:cNvPr id="10" name="PPAGENT_QA|parent=operations-node-1|domains=operations-nodes">
+            <a:extLst xmlns:a="http://schemas.openxmlformats.org/drawingml/2006/main">
+              <a:ext uri="{FF2B5EF4-FFF2-40B4-BE49-F238E27FC236}">
+                <a16:creationId xmlns:a16="http://schemas.microsoft.com/office/drawing/2014/main" id="{1DB405B7-DFA2-40A7-9BBD-AF8CCD8D4F4B}"/>
+              </a:ext>
+            </a:extLst>
+          </p:cNvPr>
+          <p:cNvSpPr>
+            <a:spLocks xmlns:a="http://schemas.openxmlformats.org/drawingml/2006/main" noGrp="1"/>
+          </p:cNvSpPr>
+          <p:nvPr/>
+        </p:nvSpPr>
+        <p:spPr>
+          <a:xfrm xmlns:a="http://schemas.openxmlformats.org/drawingml/2006/main">
+            <a:off x="3314700" y="2762250"/>
+            <a:ext cx="762000" cy="762000"/>
           </a:xfrm>
           <a:prstGeom xmlns:a="http://schemas.openxmlformats.org/drawingml/2006/main" prst="ellipse">
             <a:avLst/>
           </a:prstGeom>
-          <a:solidFill xmlns:a="http://schemas.openxmlformats.org/drawingml/2006/main">
-            <a:srgbClr val="1677C8"/>
-          </a:solidFill>
-          <a:ln xmlns:a="http://schemas.openxmlformats.org/drawingml/2006/main" w="19050">
+          <a:gradFill xmlns:a="http://schemas.openxmlformats.org/drawingml/2006/main">
+            <a:gsLst>
+              <a:gs pos="0">
+                <a:srgbClr val="FFFFFF"/>
+              </a:gs>
+              <a:gs pos="100000">
+                <a:srgbClr val="EEF2F6"/>
+              </a:gs>
+            </a:gsLst>
+            <a:lin ang="10800000"/>
+          </a:gradFill>
+          <a:ln xmlns:a="http://schemas.openxmlformats.org/drawingml/2006/main" w="14288">
             <a:solidFill>
-              <a:srgbClr val="FFFFFF"/>
+              <a:srgbClr val="D1DBE5"/>
             </a:solidFill>
             <a:prstDash val="solid"/>
           </a:ln>
@@ -1525,15 +1609,15 @@
           <a:fontRef xmlns:a="http://schemas.openxmlformats.org/drawingml/2006/main" idx="major"/>
         </p:style>
         <p:txBody>
-          <a:bodyPr xmlns:a="http://schemas.openxmlformats.org/drawingml/2006/main" lIns="114300" tIns="76200" rIns="114300" bIns="76200" anchor="ctr">
-            <a:normAutofit fontScale="98281"/>
+          <a:bodyPr xmlns:a="http://schemas.openxmlformats.org/drawingml/2006/main" lIns="47625" tIns="38100" rIns="47625" bIns="38100" anchor="ctr">
+            <a:normAutofit fontScale="100000"/>
           </a:bodyPr>
           <a:lstStyle xmlns:a="http://schemas.openxmlformats.org/drawingml/2006/main"/>
           <a:p xmlns:a="http://schemas.openxmlformats.org/drawingml/2006/main">
             <a:pPr algn="ctr">
               <a:defRPr sz="1200" b="1">
                 <a:solidFill>
-                  <a:srgbClr val="FFFFFF"/>
+                  <a:srgbClr val="00A8D8"/>
                 </a:solidFill>
                 <a:latin typeface="Microsoft YaHei"/>
                 <a:ea typeface="Microsoft YaHei"/>
@@ -1543,45 +1627,53 @@
             <a:r>
               <a:rPr sz="1200" b="1">
                 <a:solidFill>
-                  <a:srgbClr val="FFFFFF"/>
+                  <a:srgbClr val="00A8D8"/>
                 </a:solidFill>
                 <a:latin typeface="Microsoft YaHei"/>
                 <a:ea typeface="Microsoft YaHei"/>
                 <a:cs typeface="Microsoft YaHei"/>
               </a:rPr>
-              <a:t>需求</a:t>
+              <a:t>采购</a:t>
             </a:r>
           </a:p>
         </p:txBody>
       </p:sp>
       <p:sp>
         <p:nvSpPr>
-          <p:cNvPr id="10" name="">
-            <a:extLst xmlns:a="http://schemas.openxmlformats.org/drawingml/2006/main">
-              <a:ext uri="{FF2B5EF4-FFF2-40B4-BE49-F238E27FC236}">
-                <a16:creationId xmlns:a16="http://schemas.microsoft.com/office/drawing/2014/main" id="{36FADB6A-ECAF-4424-A8E0-BD50DB790F6B}"/>
-              </a:ext>
-            </a:extLst>
-          </p:cNvPr>
-          <p:cNvSpPr>
-            <a:spLocks xmlns:a="http://schemas.openxmlformats.org/drawingml/2006/main" noGrp="1"/>
-          </p:cNvSpPr>
-          <p:nvPr/>
-        </p:nvSpPr>
-        <p:spPr>
-          <a:xfrm xmlns:a="http://schemas.openxmlformats.org/drawingml/2006/main">
-            <a:off x="3302000" y="2724150"/>
-            <a:ext cx="723900" cy="723900"/>
+          <p:cNvPr id="11" name="PPAGENT_QA|parent=operations-node-2|domains=operations-nodes">
+            <a:extLst xmlns:a="http://schemas.openxmlformats.org/drawingml/2006/main">
+              <a:ext uri="{FF2B5EF4-FFF2-40B4-BE49-F238E27FC236}">
+                <a16:creationId xmlns:a16="http://schemas.microsoft.com/office/drawing/2014/main" id="{21C36C7E-1025-41B1-9D2F-A3A13271C178}"/>
+              </a:ext>
+            </a:extLst>
+          </p:cNvPr>
+          <p:cNvSpPr>
+            <a:spLocks xmlns:a="http://schemas.openxmlformats.org/drawingml/2006/main" noGrp="1"/>
+          </p:cNvSpPr>
+          <p:nvPr/>
+        </p:nvSpPr>
+        <p:spPr>
+          <a:xfrm xmlns:a="http://schemas.openxmlformats.org/drawingml/2006/main">
+            <a:off x="4914900" y="2762250"/>
+            <a:ext cx="762000" cy="762000"/>
           </a:xfrm>
           <a:prstGeom xmlns:a="http://schemas.openxmlformats.org/drawingml/2006/main" prst="ellipse">
             <a:avLst/>
           </a:prstGeom>
-          <a:solidFill xmlns:a="http://schemas.openxmlformats.org/drawingml/2006/main">
-            <a:srgbClr val="00A8D8"/>
-          </a:solidFill>
-          <a:ln xmlns:a="http://schemas.openxmlformats.org/drawingml/2006/main" w="19050">
+          <a:gradFill xmlns:a="http://schemas.openxmlformats.org/drawingml/2006/main">
+            <a:gsLst>
+              <a:gs pos="0">
+                <a:srgbClr val="FFFFFF"/>
+              </a:gs>
+              <a:gs pos="100000">
+                <a:srgbClr val="EEF2F6"/>
+              </a:gs>
+            </a:gsLst>
+            <a:lin ang="10800000"/>
+          </a:gradFill>
+          <a:ln xmlns:a="http://schemas.openxmlformats.org/drawingml/2006/main" w="14288">
             <a:solidFill>
-              <a:srgbClr val="FFFFFF"/>
+              <a:srgbClr val="D1DBE5"/>
             </a:solidFill>
             <a:prstDash val="solid"/>
           </a:ln>
@@ -1593,15 +1685,15 @@
           <a:fontRef xmlns:a="http://schemas.openxmlformats.org/drawingml/2006/main" idx="major"/>
         </p:style>
         <p:txBody>
-          <a:bodyPr xmlns:a="http://schemas.openxmlformats.org/drawingml/2006/main" lIns="114300" tIns="76200" rIns="114300" bIns="76200" anchor="ctr">
-            <a:normAutofit fontScale="98281"/>
+          <a:bodyPr xmlns:a="http://schemas.openxmlformats.org/drawingml/2006/main" lIns="47625" tIns="38100" rIns="47625" bIns="38100" anchor="ctr">
+            <a:normAutofit fontScale="100000"/>
           </a:bodyPr>
           <a:lstStyle xmlns:a="http://schemas.openxmlformats.org/drawingml/2006/main"/>
           <a:p xmlns:a="http://schemas.openxmlformats.org/drawingml/2006/main">
             <a:pPr algn="ctr">
               <a:defRPr sz="1200" b="1">
                 <a:solidFill>
-                  <a:srgbClr val="FFFFFF"/>
+                  <a:srgbClr val="1677C8"/>
                 </a:solidFill>
                 <a:latin typeface="Microsoft YaHei"/>
                 <a:ea typeface="Microsoft YaHei"/>
@@ -1611,45 +1703,53 @@
             <a:r>
               <a:rPr sz="1200" b="1">
                 <a:solidFill>
-                  <a:srgbClr val="FFFFFF"/>
+                  <a:srgbClr val="1677C8"/>
                 </a:solidFill>
                 <a:latin typeface="Microsoft YaHei"/>
                 <a:ea typeface="Microsoft YaHei"/>
                 <a:cs typeface="Microsoft YaHei"/>
               </a:rPr>
-              <a:t>采购</a:t>
+              <a:t>生产</a:t>
             </a:r>
           </a:p>
         </p:txBody>
       </p:sp>
       <p:sp>
         <p:nvSpPr>
-          <p:cNvPr id="11" name="">
-            <a:extLst xmlns:a="http://schemas.openxmlformats.org/drawingml/2006/main">
-              <a:ext uri="{FF2B5EF4-FFF2-40B4-BE49-F238E27FC236}">
-                <a16:creationId xmlns:a16="http://schemas.microsoft.com/office/drawing/2014/main" id="{543A97F4-FE28-4688-902A-D118CCA03AD9}"/>
-              </a:ext>
-            </a:extLst>
-          </p:cNvPr>
-          <p:cNvSpPr>
-            <a:spLocks xmlns:a="http://schemas.openxmlformats.org/drawingml/2006/main" noGrp="1"/>
-          </p:cNvSpPr>
-          <p:nvPr/>
-        </p:nvSpPr>
-        <p:spPr>
-          <a:xfrm xmlns:a="http://schemas.openxmlformats.org/drawingml/2006/main">
-            <a:off x="4651375" y="2724150"/>
-            <a:ext cx="723900" cy="723900"/>
+          <p:cNvPr id="12" name="PPAGENT_QA|parent=operations-node-3|domains=operations-nodes">
+            <a:extLst xmlns:a="http://schemas.openxmlformats.org/drawingml/2006/main">
+              <a:ext uri="{FF2B5EF4-FFF2-40B4-BE49-F238E27FC236}">
+                <a16:creationId xmlns:a16="http://schemas.microsoft.com/office/drawing/2014/main" id="{D518A035-E697-4A83-8E23-449EA8726F0E}"/>
+              </a:ext>
+            </a:extLst>
+          </p:cNvPr>
+          <p:cNvSpPr>
+            <a:spLocks xmlns:a="http://schemas.openxmlformats.org/drawingml/2006/main" noGrp="1"/>
+          </p:cNvSpPr>
+          <p:nvPr/>
+        </p:nvSpPr>
+        <p:spPr>
+          <a:xfrm xmlns:a="http://schemas.openxmlformats.org/drawingml/2006/main">
+            <a:off x="6515100" y="2762250"/>
+            <a:ext cx="762000" cy="762000"/>
           </a:xfrm>
           <a:prstGeom xmlns:a="http://schemas.openxmlformats.org/drawingml/2006/main" prst="ellipse">
             <a:avLst/>
           </a:prstGeom>
-          <a:solidFill xmlns:a="http://schemas.openxmlformats.org/drawingml/2006/main">
-            <a:srgbClr val="1677C8"/>
-          </a:solidFill>
-          <a:ln xmlns:a="http://schemas.openxmlformats.org/drawingml/2006/main" w="19050">
+          <a:gradFill xmlns:a="http://schemas.openxmlformats.org/drawingml/2006/main">
+            <a:gsLst>
+              <a:gs pos="0">
+                <a:srgbClr val="FFFFFF"/>
+              </a:gs>
+              <a:gs pos="100000">
+                <a:srgbClr val="EEF2F6"/>
+              </a:gs>
+            </a:gsLst>
+            <a:lin ang="10800000"/>
+          </a:gradFill>
+          <a:ln xmlns:a="http://schemas.openxmlformats.org/drawingml/2006/main" w="14288">
             <a:solidFill>
-              <a:srgbClr val="FFFFFF"/>
+              <a:srgbClr val="D1DBE5"/>
             </a:solidFill>
             <a:prstDash val="solid"/>
           </a:ln>
@@ -1661,15 +1761,15 @@
           <a:fontRef xmlns:a="http://schemas.openxmlformats.org/drawingml/2006/main" idx="major"/>
         </p:style>
         <p:txBody>
-          <a:bodyPr xmlns:a="http://schemas.openxmlformats.org/drawingml/2006/main" lIns="114300" tIns="76200" rIns="114300" bIns="76200" anchor="ctr">
-            <a:normAutofit fontScale="98281"/>
+          <a:bodyPr xmlns:a="http://schemas.openxmlformats.org/drawingml/2006/main" lIns="47625" tIns="38100" rIns="47625" bIns="38100" anchor="ctr">
+            <a:normAutofit fontScale="100000"/>
           </a:bodyPr>
           <a:lstStyle xmlns:a="http://schemas.openxmlformats.org/drawingml/2006/main"/>
           <a:p xmlns:a="http://schemas.openxmlformats.org/drawingml/2006/main">
             <a:pPr algn="ctr">
               <a:defRPr sz="1200" b="1">
                 <a:solidFill>
-                  <a:srgbClr val="FFFFFF"/>
+                  <a:srgbClr val="00A8D8"/>
                 </a:solidFill>
                 <a:latin typeface="Microsoft YaHei"/>
                 <a:ea typeface="Microsoft YaHei"/>
@@ -1679,45 +1779,53 @@
             <a:r>
               <a:rPr sz="1200" b="1">
                 <a:solidFill>
-                  <a:srgbClr val="FFFFFF"/>
+                  <a:srgbClr val="00A8D8"/>
                 </a:solidFill>
                 <a:latin typeface="Microsoft YaHei"/>
                 <a:ea typeface="Microsoft YaHei"/>
                 <a:cs typeface="Microsoft YaHei"/>
               </a:rPr>
-              <a:t>生产</a:t>
+              <a:t>仓储</a:t>
             </a:r>
           </a:p>
         </p:txBody>
       </p:sp>
       <p:sp>
         <p:nvSpPr>
-          <p:cNvPr id="12" name="">
-            <a:extLst xmlns:a="http://schemas.openxmlformats.org/drawingml/2006/main">
-              <a:ext uri="{FF2B5EF4-FFF2-40B4-BE49-F238E27FC236}">
-                <a16:creationId xmlns:a16="http://schemas.microsoft.com/office/drawing/2014/main" id="{84F54835-005E-4711-82DB-48B31962F359}"/>
-              </a:ext>
-            </a:extLst>
-          </p:cNvPr>
-          <p:cNvSpPr>
-            <a:spLocks xmlns:a="http://schemas.openxmlformats.org/drawingml/2006/main" noGrp="1"/>
-          </p:cNvSpPr>
-          <p:nvPr/>
-        </p:nvSpPr>
-        <p:spPr>
-          <a:xfrm xmlns:a="http://schemas.openxmlformats.org/drawingml/2006/main">
-            <a:off x="6000750" y="2724150"/>
-            <a:ext cx="723900" cy="723900"/>
+          <p:cNvPr id="13" name="PPAGENT_QA|parent=operations-node-4|domains=operations-nodes">
+            <a:extLst xmlns:a="http://schemas.openxmlformats.org/drawingml/2006/main">
+              <a:ext uri="{FF2B5EF4-FFF2-40B4-BE49-F238E27FC236}">
+                <a16:creationId xmlns:a16="http://schemas.microsoft.com/office/drawing/2014/main" id="{BB979277-FBD1-4442-86DB-707FF9D3268C}"/>
+              </a:ext>
+            </a:extLst>
+          </p:cNvPr>
+          <p:cNvSpPr>
+            <a:spLocks xmlns:a="http://schemas.openxmlformats.org/drawingml/2006/main" noGrp="1"/>
+          </p:cNvSpPr>
+          <p:nvPr/>
+        </p:nvSpPr>
+        <p:spPr>
+          <a:xfrm xmlns:a="http://schemas.openxmlformats.org/drawingml/2006/main">
+            <a:off x="8115300" y="2762250"/>
+            <a:ext cx="762000" cy="762000"/>
           </a:xfrm>
           <a:prstGeom xmlns:a="http://schemas.openxmlformats.org/drawingml/2006/main" prst="ellipse">
             <a:avLst/>
           </a:prstGeom>
-          <a:solidFill xmlns:a="http://schemas.openxmlformats.org/drawingml/2006/main">
-            <a:srgbClr val="00A8D8"/>
-          </a:solidFill>
-          <a:ln xmlns:a="http://schemas.openxmlformats.org/drawingml/2006/main" w="19050">
+          <a:gradFill xmlns:a="http://schemas.openxmlformats.org/drawingml/2006/main">
+            <a:gsLst>
+              <a:gs pos="0">
+                <a:srgbClr val="FFFFFF"/>
+              </a:gs>
+              <a:gs pos="100000">
+                <a:srgbClr val="EEF2F6"/>
+              </a:gs>
+            </a:gsLst>
+            <a:lin ang="10800000"/>
+          </a:gradFill>
+          <a:ln xmlns:a="http://schemas.openxmlformats.org/drawingml/2006/main" w="14288">
             <a:solidFill>
-              <a:srgbClr val="FFFFFF"/>
+              <a:srgbClr val="D1DBE5"/>
             </a:solidFill>
             <a:prstDash val="solid"/>
           </a:ln>
@@ -1729,15 +1837,15 @@
           <a:fontRef xmlns:a="http://schemas.openxmlformats.org/drawingml/2006/main" idx="major"/>
         </p:style>
         <p:txBody>
-          <a:bodyPr xmlns:a="http://schemas.openxmlformats.org/drawingml/2006/main" lIns="114300" tIns="76200" rIns="114300" bIns="76200" anchor="ctr">
-            <a:normAutofit fontScale="98281"/>
+          <a:bodyPr xmlns:a="http://schemas.openxmlformats.org/drawingml/2006/main" lIns="47625" tIns="38100" rIns="47625" bIns="38100" anchor="ctr">
+            <a:normAutofit fontScale="100000"/>
           </a:bodyPr>
           <a:lstStyle xmlns:a="http://schemas.openxmlformats.org/drawingml/2006/main"/>
           <a:p xmlns:a="http://schemas.openxmlformats.org/drawingml/2006/main">
             <a:pPr algn="ctr">
               <a:defRPr sz="1200" b="1">
                 <a:solidFill>
-                  <a:srgbClr val="FFFFFF"/>
+                  <a:srgbClr val="1677C8"/>
                 </a:solidFill>
                 <a:latin typeface="Microsoft YaHei"/>
                 <a:ea typeface="Microsoft YaHei"/>
@@ -1747,45 +1855,53 @@
             <a:r>
               <a:rPr sz="1200" b="1">
                 <a:solidFill>
-                  <a:srgbClr val="FFFFFF"/>
+                  <a:srgbClr val="1677C8"/>
                 </a:solidFill>
                 <a:latin typeface="Microsoft YaHei"/>
                 <a:ea typeface="Microsoft YaHei"/>
                 <a:cs typeface="Microsoft YaHei"/>
               </a:rPr>
-              <a:t>仓储</a:t>
+              <a:t>物流</a:t>
             </a:r>
           </a:p>
         </p:txBody>
       </p:sp>
       <p:sp>
         <p:nvSpPr>
-          <p:cNvPr id="13" name="">
-            <a:extLst xmlns:a="http://schemas.openxmlformats.org/drawingml/2006/main">
-              <a:ext uri="{FF2B5EF4-FFF2-40B4-BE49-F238E27FC236}">
-                <a16:creationId xmlns:a16="http://schemas.microsoft.com/office/drawing/2014/main" id="{BBDAE65A-8EF1-4587-B839-CA30B820D21D}"/>
-              </a:ext>
-            </a:extLst>
-          </p:cNvPr>
-          <p:cNvSpPr>
-            <a:spLocks xmlns:a="http://schemas.openxmlformats.org/drawingml/2006/main" noGrp="1"/>
-          </p:cNvSpPr>
-          <p:nvPr/>
-        </p:nvSpPr>
-        <p:spPr>
-          <a:xfrm xmlns:a="http://schemas.openxmlformats.org/drawingml/2006/main">
-            <a:off x="7350125" y="2724150"/>
-            <a:ext cx="723900" cy="723900"/>
+          <p:cNvPr id="14" name="PPAGENT_QA|parent=operations-node-5|domains=operations-nodes">
+            <a:extLst xmlns:a="http://schemas.openxmlformats.org/drawingml/2006/main">
+              <a:ext uri="{FF2B5EF4-FFF2-40B4-BE49-F238E27FC236}">
+                <a16:creationId xmlns:a16="http://schemas.microsoft.com/office/drawing/2014/main" id="{B22217AA-83CF-4EEE-B0F8-6C07C8547699}"/>
+              </a:ext>
+            </a:extLst>
+          </p:cNvPr>
+          <p:cNvSpPr>
+            <a:spLocks xmlns:a="http://schemas.openxmlformats.org/drawingml/2006/main" noGrp="1"/>
+          </p:cNvSpPr>
+          <p:nvPr/>
+        </p:nvSpPr>
+        <p:spPr>
+          <a:xfrm xmlns:a="http://schemas.openxmlformats.org/drawingml/2006/main">
+            <a:off x="9715500" y="2762250"/>
+            <a:ext cx="762000" cy="762000"/>
           </a:xfrm>
           <a:prstGeom xmlns:a="http://schemas.openxmlformats.org/drawingml/2006/main" prst="ellipse">
             <a:avLst/>
           </a:prstGeom>
-          <a:solidFill xmlns:a="http://schemas.openxmlformats.org/drawingml/2006/main">
-            <a:srgbClr val="1677C8"/>
-          </a:solidFill>
-          <a:ln xmlns:a="http://schemas.openxmlformats.org/drawingml/2006/main" w="19050">
+          <a:gradFill xmlns:a="http://schemas.openxmlformats.org/drawingml/2006/main">
+            <a:gsLst>
+              <a:gs pos="0">
+                <a:srgbClr val="FFFFFF"/>
+              </a:gs>
+              <a:gs pos="100000">
+                <a:srgbClr val="EEF2F6"/>
+              </a:gs>
+            </a:gsLst>
+            <a:lin ang="10800000"/>
+          </a:gradFill>
+          <a:ln xmlns:a="http://schemas.openxmlformats.org/drawingml/2006/main" w="14288">
             <a:solidFill>
-              <a:srgbClr val="FFFFFF"/>
+              <a:srgbClr val="D1DBE5"/>
             </a:solidFill>
             <a:prstDash val="solid"/>
           </a:ln>
@@ -1797,15 +1913,15 @@
           <a:fontRef xmlns:a="http://schemas.openxmlformats.org/drawingml/2006/main" idx="major"/>
         </p:style>
         <p:txBody>
-          <a:bodyPr xmlns:a="http://schemas.openxmlformats.org/drawingml/2006/main" lIns="114300" tIns="76200" rIns="114300" bIns="76200" anchor="ctr">
-            <a:normAutofit fontScale="98281"/>
+          <a:bodyPr xmlns:a="http://schemas.openxmlformats.org/drawingml/2006/main" lIns="47625" tIns="38100" rIns="47625" bIns="38100" anchor="ctr">
+            <a:normAutofit fontScale="100000"/>
           </a:bodyPr>
           <a:lstStyle xmlns:a="http://schemas.openxmlformats.org/drawingml/2006/main"/>
           <a:p xmlns:a="http://schemas.openxmlformats.org/drawingml/2006/main">
             <a:pPr algn="ctr">
               <a:defRPr sz="1200" b="1">
                 <a:solidFill>
-                  <a:srgbClr val="FFFFFF"/>
+                  <a:srgbClr val="00A8D8"/>
                 </a:solidFill>
                 <a:latin typeface="Microsoft YaHei"/>
                 <a:ea typeface="Microsoft YaHei"/>
@@ -1815,75 +1931,7 @@
             <a:r>
               <a:rPr sz="1200" b="1">
                 <a:solidFill>
-                  <a:srgbClr val="FFFFFF"/>
-                </a:solidFill>
-                <a:latin typeface="Microsoft YaHei"/>
-                <a:ea typeface="Microsoft YaHei"/>
-                <a:cs typeface="Microsoft YaHei"/>
-              </a:rPr>
-              <a:t>物流</a:t>
-            </a:r>
-          </a:p>
-        </p:txBody>
-      </p:sp>
-      <p:sp>
-        <p:nvSpPr>
-          <p:cNvPr id="14" name="">
-            <a:extLst xmlns:a="http://schemas.openxmlformats.org/drawingml/2006/main">
-              <a:ext uri="{FF2B5EF4-FFF2-40B4-BE49-F238E27FC236}">
-                <a16:creationId xmlns:a16="http://schemas.microsoft.com/office/drawing/2014/main" id="{35817A89-A2BB-446B-BAC7-05B7934C8312}"/>
-              </a:ext>
-            </a:extLst>
-          </p:cNvPr>
-          <p:cNvSpPr>
-            <a:spLocks xmlns:a="http://schemas.openxmlformats.org/drawingml/2006/main" noGrp="1"/>
-          </p:cNvSpPr>
-          <p:nvPr/>
-        </p:nvSpPr>
-        <p:spPr>
-          <a:xfrm xmlns:a="http://schemas.openxmlformats.org/drawingml/2006/main">
-            <a:off x="8699500" y="2724150"/>
-            <a:ext cx="723900" cy="723900"/>
-          </a:xfrm>
-          <a:prstGeom xmlns:a="http://schemas.openxmlformats.org/drawingml/2006/main" prst="ellipse">
-            <a:avLst/>
-          </a:prstGeom>
-          <a:solidFill xmlns:a="http://schemas.openxmlformats.org/drawingml/2006/main">
-            <a:srgbClr val="00A8D8"/>
-          </a:solidFill>
-          <a:ln xmlns:a="http://schemas.openxmlformats.org/drawingml/2006/main" w="19050">
-            <a:solidFill>
-              <a:srgbClr val="FFFFFF"/>
-            </a:solidFill>
-            <a:prstDash val="solid"/>
-          </a:ln>
-        </p:spPr>
-        <p:style>
-          <a:lnRef xmlns:a="http://schemas.openxmlformats.org/drawingml/2006/main" idx="0"/>
-          <a:fillRef xmlns:a="http://schemas.openxmlformats.org/drawingml/2006/main" idx="0"/>
-          <a:effectRef xmlns:a="http://schemas.openxmlformats.org/drawingml/2006/main" idx="4"/>
-          <a:fontRef xmlns:a="http://schemas.openxmlformats.org/drawingml/2006/main" idx="major"/>
-        </p:style>
-        <p:txBody>
-          <a:bodyPr xmlns:a="http://schemas.openxmlformats.org/drawingml/2006/main" lIns="114300" tIns="76200" rIns="114300" bIns="76200" anchor="ctr">
-            <a:normAutofit fontScale="98281"/>
-          </a:bodyPr>
-          <a:lstStyle xmlns:a="http://schemas.openxmlformats.org/drawingml/2006/main"/>
-          <a:p xmlns:a="http://schemas.openxmlformats.org/drawingml/2006/main">
-            <a:pPr algn="ctr">
-              <a:defRPr sz="1200" b="1">
-                <a:solidFill>
-                  <a:srgbClr val="FFFFFF"/>
-                </a:solidFill>
-                <a:latin typeface="Microsoft YaHei"/>
-                <a:ea typeface="Microsoft YaHei"/>
-                <a:cs typeface="Microsoft YaHei"/>
-              </a:defRPr>
-            </a:pPr>
-            <a:r>
-              <a:rPr sz="1200" b="1">
-                <a:solidFill>
-                  <a:srgbClr val="FFFFFF"/>
+                  <a:srgbClr val="00A8D8"/>
                 </a:solidFill>
                 <a:latin typeface="Microsoft YaHei"/>
                 <a:ea typeface="Microsoft YaHei"/>
@@ -1899,24 +1947,22 @@
           <p:cNvPr id="15" name="">
             <a:extLst xmlns:a="http://schemas.openxmlformats.org/drawingml/2006/main">
               <a:ext uri="{FF2B5EF4-FFF2-40B4-BE49-F238E27FC236}">
-                <a16:creationId xmlns:a16="http://schemas.microsoft.com/office/drawing/2014/main" id="{F48537B9-07E8-4B2D-A24A-30179C46BADD}"/>
-              </a:ext>
-            </a:extLst>
-          </p:cNvPr>
-          <p:cNvSpPr>
-            <a:spLocks xmlns:a="http://schemas.openxmlformats.org/drawingml/2006/main" noGrp="1"/>
-          </p:cNvSpPr>
-          <p:nvPr/>
-        </p:nvSpPr>
-        <p:spPr>
-          <a:xfrm xmlns:a="http://schemas.openxmlformats.org/drawingml/2006/main">
-            <a:off x="723900" y="2152650"/>
-            <a:ext cx="762000" cy="1409700"/>
-          </a:xfrm>
-          <a:prstGeom xmlns:a="http://schemas.openxmlformats.org/drawingml/2006/main" prst="roundRect">
-            <a:avLst>
-              <a:gd name="adj" fmla="val 15000"/>
-            </a:avLst>
+                <a16:creationId xmlns:a16="http://schemas.microsoft.com/office/drawing/2014/main" id="{47587AB5-3794-4F52-8B46-8A59A75B9AEE}"/>
+              </a:ext>
+            </a:extLst>
+          </p:cNvPr>
+          <p:cNvSpPr>
+            <a:spLocks xmlns:a="http://schemas.openxmlformats.org/drawingml/2006/main" noGrp="1"/>
+          </p:cNvSpPr>
+          <p:nvPr/>
+        </p:nvSpPr>
+        <p:spPr>
+          <a:xfrm xmlns:a="http://schemas.openxmlformats.org/drawingml/2006/main">
+            <a:off x="685800" y="2076450"/>
+            <a:ext cx="742950" cy="1638300"/>
+          </a:xfrm>
+          <a:prstGeom xmlns:a="http://schemas.openxmlformats.org/drawingml/2006/main" prst="downArrow">
+            <a:avLst/>
           </a:prstGeom>
           <a:solidFill xmlns:a="http://schemas.openxmlformats.org/drawingml/2006/main">
             <a:srgbClr val="1677C8"/>
@@ -1928,7 +1974,7 @@
         </p:spPr>
         <p:txBody>
           <a:bodyPr xmlns:a="http://schemas.openxmlformats.org/drawingml/2006/main" lIns="114300" tIns="76200" rIns="114300" bIns="76200" anchor="ctr">
-            <a:normAutofit fontScale="100000"/>
+            <a:normAutofit fontScale="83792"/>
           </a:bodyPr>
           <a:lstStyle xmlns:a="http://schemas.openxmlformats.org/drawingml/2006/main"/>
           <a:p xmlns:a="http://schemas.openxmlformats.org/drawingml/2006/main">
@@ -1961,24 +2007,22 @@
           <p:cNvPr id="16" name="">
             <a:extLst xmlns:a="http://schemas.openxmlformats.org/drawingml/2006/main">
               <a:ext uri="{FF2B5EF4-FFF2-40B4-BE49-F238E27FC236}">
-                <a16:creationId xmlns:a16="http://schemas.microsoft.com/office/drawing/2014/main" id="{F556973F-F09D-4B6F-8572-141EEE172D91}"/>
-              </a:ext>
-            </a:extLst>
-          </p:cNvPr>
-          <p:cNvSpPr>
-            <a:spLocks xmlns:a="http://schemas.openxmlformats.org/drawingml/2006/main" noGrp="1"/>
-          </p:cNvSpPr>
-          <p:nvPr/>
-        </p:nvSpPr>
-        <p:spPr>
-          <a:xfrm xmlns:a="http://schemas.openxmlformats.org/drawingml/2006/main">
-            <a:off x="10706100" y="2152650"/>
-            <a:ext cx="762000" cy="1409700"/>
-          </a:xfrm>
-          <a:prstGeom xmlns:a="http://schemas.openxmlformats.org/drawingml/2006/main" prst="roundRect">
-            <a:avLst>
-              <a:gd name="adj" fmla="val 15000"/>
-            </a:avLst>
+                <a16:creationId xmlns:a16="http://schemas.microsoft.com/office/drawing/2014/main" id="{3BF3EF1C-BDAE-4F13-ADB5-0B28BB0DD352}"/>
+              </a:ext>
+            </a:extLst>
+          </p:cNvPr>
+          <p:cNvSpPr>
+            <a:spLocks xmlns:a="http://schemas.openxmlformats.org/drawingml/2006/main" noGrp="1"/>
+          </p:cNvSpPr>
+          <p:nvPr/>
+        </p:nvSpPr>
+        <p:spPr>
+          <a:xfrm xmlns:a="http://schemas.openxmlformats.org/drawingml/2006/main">
+            <a:off x="10763250" y="2076450"/>
+            <a:ext cx="742950" cy="1638300"/>
+          </a:xfrm>
+          <a:prstGeom xmlns:a="http://schemas.openxmlformats.org/drawingml/2006/main" prst="upArrow">
+            <a:avLst/>
           </a:prstGeom>
           <a:solidFill xmlns:a="http://schemas.openxmlformats.org/drawingml/2006/main">
             <a:srgbClr val="00A8D8"/>
@@ -1990,7 +2034,7 @@
         </p:spPr>
         <p:txBody>
           <a:bodyPr xmlns:a="http://schemas.openxmlformats.org/drawingml/2006/main" lIns="114300" tIns="76200" rIns="114300" bIns="76200" anchor="ctr">
-            <a:normAutofit fontScale="100000"/>
+            <a:normAutofit fontScale="83792"/>
           </a:bodyPr>
           <a:lstStyle xmlns:a="http://schemas.openxmlformats.org/drawingml/2006/main"/>
           <a:p xmlns:a="http://schemas.openxmlformats.org/drawingml/2006/main">
@@ -2020,34 +2064,34 @@
       </p:sp>
       <p:sp>
         <p:nvSpPr>
-          <p:cNvPr id="17" name="">
-            <a:extLst xmlns:a="http://schemas.openxmlformats.org/drawingml/2006/main">
-              <a:ext uri="{FF2B5EF4-FFF2-40B4-BE49-F238E27FC236}">
-                <a16:creationId xmlns:a16="http://schemas.microsoft.com/office/drawing/2014/main" id="{D82083C2-0DB4-4A1A-BE3F-D72E67EEF4CB}"/>
-              </a:ext>
-            </a:extLst>
-          </p:cNvPr>
-          <p:cNvSpPr>
-            <a:spLocks xmlns:a="http://schemas.openxmlformats.org/drawingml/2006/main" noGrp="1"/>
-          </p:cNvSpPr>
-          <p:nvPr/>
-        </p:nvSpPr>
-        <p:spPr>
-          <a:xfrm xmlns:a="http://schemas.openxmlformats.org/drawingml/2006/main">
-            <a:off x="571500" y="4305300"/>
-            <a:ext cx="2662238" cy="2000250"/>
+          <p:cNvPr id="17" name="PPAGENT_QA|parent=operations-pillar-0|domains=operations-pillars">
+            <a:extLst xmlns:a="http://schemas.openxmlformats.org/drawingml/2006/main">
+              <a:ext uri="{FF2B5EF4-FFF2-40B4-BE49-F238E27FC236}">
+                <a16:creationId xmlns:a16="http://schemas.microsoft.com/office/drawing/2014/main" id="{4220D9B4-82A3-4B00-8571-2EBB1FFA49CA}"/>
+              </a:ext>
+            </a:extLst>
+          </p:cNvPr>
+          <p:cNvSpPr>
+            <a:spLocks xmlns:a="http://schemas.openxmlformats.org/drawingml/2006/main" noGrp="1"/>
+          </p:cNvSpPr>
+          <p:nvPr/>
+        </p:nvSpPr>
+        <p:spPr>
+          <a:xfrm xmlns:a="http://schemas.openxmlformats.org/drawingml/2006/main">
+            <a:off x="666750" y="4267200"/>
+            <a:ext cx="2628900" cy="2038350"/>
           </a:xfrm>
           <a:prstGeom xmlns:a="http://schemas.openxmlformats.org/drawingml/2006/main" prst="roundRect">
             <a:avLst>
-              <a:gd name="adj" fmla="val 5714"/>
+              <a:gd name="adj" fmla="val 5607"/>
             </a:avLst>
           </a:prstGeom>
           <a:solidFill xmlns:a="http://schemas.openxmlformats.org/drawingml/2006/main">
-            <a:srgbClr val="FFFFFF"/>
-          </a:solidFill>
-          <a:ln xmlns:a="http://schemas.openxmlformats.org/drawingml/2006/main" w="14288">
+            <a:srgbClr val="F7F9FB"/>
+          </a:solidFill>
+          <a:ln xmlns:a="http://schemas.openxmlformats.org/drawingml/2006/main" w="9525">
             <a:solidFill>
-              <a:srgbClr val="1677C8"/>
+              <a:srgbClr val="D6E0E8"/>
             </a:solidFill>
             <a:prstDash val="solid"/>
           </a:ln>
@@ -2055,7 +2099,7 @@
         <p:style>
           <a:lnRef xmlns:a="http://schemas.openxmlformats.org/drawingml/2006/main" idx="0"/>
           <a:fillRef xmlns:a="http://schemas.openxmlformats.org/drawingml/2006/main" idx="0"/>
-          <a:effectRef xmlns:a="http://schemas.openxmlformats.org/drawingml/2006/main" idx="4"/>
+          <a:effectRef xmlns:a="http://schemas.openxmlformats.org/drawingml/2006/main" idx="6"/>
           <a:fontRef xmlns:a="http://schemas.openxmlformats.org/drawingml/2006/main" idx="major"/>
         </p:style>
       </p:sp>
@@ -2064,19 +2108,19 @@
           <p:cNvPr id="18" name="">
             <a:extLst xmlns:a="http://schemas.openxmlformats.org/drawingml/2006/main">
               <a:ext uri="{FF2B5EF4-FFF2-40B4-BE49-F238E27FC236}">
-                <a16:creationId xmlns:a16="http://schemas.microsoft.com/office/drawing/2014/main" id="{570DDBF3-00DA-4021-B538-7DC8BB20EC31}"/>
-              </a:ext>
-            </a:extLst>
-          </p:cNvPr>
-          <p:cNvSpPr>
-            <a:spLocks xmlns:a="http://schemas.openxmlformats.org/drawingml/2006/main" noGrp="1"/>
-          </p:cNvSpPr>
-          <p:nvPr/>
-        </p:nvSpPr>
-        <p:spPr>
-          <a:xfrm xmlns:a="http://schemas.openxmlformats.org/drawingml/2006/main">
-            <a:off x="571500" y="4305300"/>
-            <a:ext cx="2662238" cy="457200"/>
+                <a16:creationId xmlns:a16="http://schemas.microsoft.com/office/drawing/2014/main" id="{B8B5D26A-172A-4960-A768-BB504F4ED4C2}"/>
+              </a:ext>
+            </a:extLst>
+          </p:cNvPr>
+          <p:cNvSpPr>
+            <a:spLocks xmlns:a="http://schemas.openxmlformats.org/drawingml/2006/main" noGrp="1"/>
+          </p:cNvSpPr>
+          <p:nvPr/>
+        </p:nvSpPr>
+        <p:spPr>
+          <a:xfrm xmlns:a="http://schemas.openxmlformats.org/drawingml/2006/main">
+            <a:off x="666750" y="4305300"/>
+            <a:ext cx="2628900" cy="457200"/>
           </a:xfrm>
           <a:prstGeom xmlns:a="http://schemas.openxmlformats.org/drawingml/2006/main" prst="roundRect">
             <a:avLst>
@@ -2084,7 +2128,7 @@
             </a:avLst>
           </a:prstGeom>
           <a:solidFill xmlns:a="http://schemas.openxmlformats.org/drawingml/2006/main">
-            <a:srgbClr val="1677C8"/>
+            <a:srgbClr val="315AA7"/>
           </a:solidFill>
           <a:ln xmlns:a="http://schemas.openxmlformats.org/drawingml/2006/main" w="0">
             <a:noFill/>
@@ -2126,19 +2170,19 @@
           <p:cNvPr id="19" name="">
             <a:extLst xmlns:a="http://schemas.openxmlformats.org/drawingml/2006/main">
               <a:ext uri="{FF2B5EF4-FFF2-40B4-BE49-F238E27FC236}">
-                <a16:creationId xmlns:a16="http://schemas.microsoft.com/office/drawing/2014/main" id="{DCDCD656-E5BE-4E21-BACD-01F0BCB30C0D}"/>
-              </a:ext>
-            </a:extLst>
-          </p:cNvPr>
-          <p:cNvSpPr>
-            <a:spLocks xmlns:a="http://schemas.openxmlformats.org/drawingml/2006/main" noGrp="1"/>
-          </p:cNvSpPr>
-          <p:nvPr/>
-        </p:nvSpPr>
-        <p:spPr>
-          <a:xfrm xmlns:a="http://schemas.openxmlformats.org/drawingml/2006/main">
-            <a:off x="742950" y="4914900"/>
-            <a:ext cx="2319338" cy="1181100"/>
+                <a16:creationId xmlns:a16="http://schemas.microsoft.com/office/drawing/2014/main" id="{D3BDD23D-A8FD-4298-8C0A-F29A5DFE57F5}"/>
+              </a:ext>
+            </a:extLst>
+          </p:cNvPr>
+          <p:cNvSpPr>
+            <a:spLocks xmlns:a="http://schemas.openxmlformats.org/drawingml/2006/main" noGrp="1"/>
+          </p:cNvSpPr>
+          <p:nvPr/>
+        </p:nvSpPr>
+        <p:spPr>
+          <a:xfrm xmlns:a="http://schemas.openxmlformats.org/drawingml/2006/main">
+            <a:off x="800100" y="4857750"/>
+            <a:ext cx="2362200" cy="476250"/>
           </a:xfrm>
           <a:prstGeom xmlns:a="http://schemas.openxmlformats.org/drawingml/2006/main" prst="rect">
             <a:avLst/>
@@ -2155,7 +2199,7 @@
           </a:bodyPr>
           <a:lstStyle xmlns:a="http://schemas.openxmlformats.org/drawingml/2006/main"/>
           <a:p xmlns:a="http://schemas.openxmlformats.org/drawingml/2006/main">
-            <a:pPr algn="l">
+            <a:pPr algn="ctr">
               <a:defRPr sz="1200" b="0">
                 <a:solidFill>
                   <a:srgbClr val="475569"/>
@@ -2174,14 +2218,55 @@
                 <a:ea typeface="Microsoft YaHei"/>
                 <a:cs typeface="Microsoft YaHei"/>
               </a:rPr>
-              <a:t>• 采购决策</a:t>
+              <a:t>用数据支持关键经营判断</a:t>
             </a:r>
           </a:p>
+        </p:txBody>
+      </p:sp>
+      <p:sp>
+        <p:nvSpPr>
+          <p:cNvPr id="20" name="">
+            <a:extLst xmlns:a="http://schemas.openxmlformats.org/drawingml/2006/main">
+              <a:ext uri="{FF2B5EF4-FFF2-40B4-BE49-F238E27FC236}">
+                <a16:creationId xmlns:a16="http://schemas.microsoft.com/office/drawing/2014/main" id="{EE48E01F-EE66-4141-8C26-AFE292D90D08}"/>
+              </a:ext>
+            </a:extLst>
+          </p:cNvPr>
+          <p:cNvSpPr>
+            <a:spLocks xmlns:a="http://schemas.openxmlformats.org/drawingml/2006/main" noGrp="1"/>
+          </p:cNvSpPr>
+          <p:nvPr/>
+        </p:nvSpPr>
+        <p:spPr>
+          <a:xfrm xmlns:a="http://schemas.openxmlformats.org/drawingml/2006/main">
+            <a:off x="800100" y="5429250"/>
+            <a:ext cx="1152525" cy="285750"/>
+          </a:xfrm>
+          <a:prstGeom xmlns:a="http://schemas.openxmlformats.org/drawingml/2006/main" prst="roundRect">
+            <a:avLst>
+              <a:gd name="adj" fmla="val 40000"/>
+            </a:avLst>
+          </a:prstGeom>
+          <a:solidFill xmlns:a="http://schemas.openxmlformats.org/drawingml/2006/main">
+            <a:srgbClr val="FFFFFF"/>
+          </a:solidFill>
+          <a:ln xmlns:a="http://schemas.openxmlformats.org/drawingml/2006/main" w="9525">
+            <a:solidFill>
+              <a:srgbClr val="315AA7"/>
+            </a:solidFill>
+            <a:prstDash val="solid"/>
+          </a:ln>
+        </p:spPr>
+        <p:txBody>
+          <a:bodyPr xmlns:a="http://schemas.openxmlformats.org/drawingml/2006/main" lIns="47625" tIns="9525" rIns="47625" bIns="9525" anchor="ctr">
+            <a:normAutofit fontScale="100000"/>
+          </a:bodyPr>
+          <a:lstStyle xmlns:a="http://schemas.openxmlformats.org/drawingml/2006/main"/>
           <a:p xmlns:a="http://schemas.openxmlformats.org/drawingml/2006/main">
-            <a:pPr algn="l">
+            <a:pPr algn="ctr">
               <a:defRPr sz="1200" b="0">
                 <a:solidFill>
-                  <a:srgbClr val="475569"/>
+                  <a:srgbClr val="315AA7"/>
                 </a:solidFill>
                 <a:latin typeface="Microsoft YaHei"/>
                 <a:ea typeface="Microsoft YaHei"/>
@@ -2191,20 +2276,61 @@
             <a:r>
               <a:rPr sz="1200" b="0">
                 <a:solidFill>
-                  <a:srgbClr val="475569"/>
+                  <a:srgbClr val="315AA7"/>
                 </a:solidFill>
                 <a:latin typeface="Microsoft YaHei"/>
                 <a:ea typeface="Microsoft YaHei"/>
                 <a:cs typeface="Microsoft YaHei"/>
               </a:rPr>
-              <a:t>• 配送决策</a:t>
+              <a:t>采购决策</a:t>
             </a:r>
           </a:p>
+        </p:txBody>
+      </p:sp>
+      <p:sp>
+        <p:nvSpPr>
+          <p:cNvPr id="21" name="">
+            <a:extLst xmlns:a="http://schemas.openxmlformats.org/drawingml/2006/main">
+              <a:ext uri="{FF2B5EF4-FFF2-40B4-BE49-F238E27FC236}">
+                <a16:creationId xmlns:a16="http://schemas.microsoft.com/office/drawing/2014/main" id="{85CDC211-0FCA-48A1-A39B-DCBA4E4B0CE6}"/>
+              </a:ext>
+            </a:extLst>
+          </p:cNvPr>
+          <p:cNvSpPr>
+            <a:spLocks xmlns:a="http://schemas.openxmlformats.org/drawingml/2006/main" noGrp="1"/>
+          </p:cNvSpPr>
+          <p:nvPr/>
+        </p:nvSpPr>
+        <p:spPr>
+          <a:xfrm xmlns:a="http://schemas.openxmlformats.org/drawingml/2006/main">
+            <a:off x="2009775" y="5429250"/>
+            <a:ext cx="1152525" cy="285750"/>
+          </a:xfrm>
+          <a:prstGeom xmlns:a="http://schemas.openxmlformats.org/drawingml/2006/main" prst="roundRect">
+            <a:avLst>
+              <a:gd name="adj" fmla="val 40000"/>
+            </a:avLst>
+          </a:prstGeom>
+          <a:solidFill xmlns:a="http://schemas.openxmlformats.org/drawingml/2006/main">
+            <a:srgbClr val="FFFFFF"/>
+          </a:solidFill>
+          <a:ln xmlns:a="http://schemas.openxmlformats.org/drawingml/2006/main" w="9525">
+            <a:solidFill>
+              <a:srgbClr val="315AA7"/>
+            </a:solidFill>
+            <a:prstDash val="solid"/>
+          </a:ln>
+        </p:spPr>
+        <p:txBody>
+          <a:bodyPr xmlns:a="http://schemas.openxmlformats.org/drawingml/2006/main" lIns="47625" tIns="9525" rIns="47625" bIns="9525" anchor="ctr">
+            <a:normAutofit fontScale="100000"/>
+          </a:bodyPr>
+          <a:lstStyle xmlns:a="http://schemas.openxmlformats.org/drawingml/2006/main"/>
           <a:p xmlns:a="http://schemas.openxmlformats.org/drawingml/2006/main">
-            <a:pPr algn="l">
+            <a:pPr algn="ctr">
               <a:defRPr sz="1200" b="0">
                 <a:solidFill>
-                  <a:srgbClr val="475569"/>
+                  <a:srgbClr val="315AA7"/>
                 </a:solidFill>
                 <a:latin typeface="Microsoft YaHei"/>
                 <a:ea typeface="Microsoft YaHei"/>
@@ -2214,47 +2340,111 @@
             <a:r>
               <a:rPr sz="1200" b="0">
                 <a:solidFill>
-                  <a:srgbClr val="475569"/>
+                  <a:srgbClr val="315AA7"/>
                 </a:solidFill>
                 <a:latin typeface="Microsoft YaHei"/>
                 <a:ea typeface="Microsoft YaHei"/>
                 <a:cs typeface="Microsoft YaHei"/>
               </a:rPr>
-              <a:t>• 运营决策</a:t>
+              <a:t>配送决策</a:t>
             </a:r>
           </a:p>
         </p:txBody>
       </p:sp>
       <p:sp>
         <p:nvSpPr>
-          <p:cNvPr id="20" name="">
-            <a:extLst xmlns:a="http://schemas.openxmlformats.org/drawingml/2006/main">
-              <a:ext uri="{FF2B5EF4-FFF2-40B4-BE49-F238E27FC236}">
-                <a16:creationId xmlns:a16="http://schemas.microsoft.com/office/drawing/2014/main" id="{31F81B70-6776-4677-9F3E-A33576FA117C}"/>
-              </a:ext>
-            </a:extLst>
-          </p:cNvPr>
-          <p:cNvSpPr>
-            <a:spLocks xmlns:a="http://schemas.openxmlformats.org/drawingml/2006/main" noGrp="1"/>
-          </p:cNvSpPr>
-          <p:nvPr/>
-        </p:nvSpPr>
-        <p:spPr>
-          <a:xfrm xmlns:a="http://schemas.openxmlformats.org/drawingml/2006/main">
-            <a:off x="3367088" y="4305300"/>
-            <a:ext cx="2662238" cy="2000250"/>
+          <p:cNvPr id="22" name="">
+            <a:extLst xmlns:a="http://schemas.openxmlformats.org/drawingml/2006/main">
+              <a:ext uri="{FF2B5EF4-FFF2-40B4-BE49-F238E27FC236}">
+                <a16:creationId xmlns:a16="http://schemas.microsoft.com/office/drawing/2014/main" id="{2F28FD7B-59E6-4A47-8BEC-D04074475F6F}"/>
+              </a:ext>
+            </a:extLst>
+          </p:cNvPr>
+          <p:cNvSpPr>
+            <a:spLocks xmlns:a="http://schemas.openxmlformats.org/drawingml/2006/main" noGrp="1"/>
+          </p:cNvSpPr>
+          <p:nvPr/>
+        </p:nvSpPr>
+        <p:spPr>
+          <a:xfrm xmlns:a="http://schemas.openxmlformats.org/drawingml/2006/main">
+            <a:off x="800100" y="5772150"/>
+            <a:ext cx="1152525" cy="285750"/>
           </a:xfrm>
           <a:prstGeom xmlns:a="http://schemas.openxmlformats.org/drawingml/2006/main" prst="roundRect">
             <a:avLst>
-              <a:gd name="adj" fmla="val 5714"/>
+              <a:gd name="adj" fmla="val 40000"/>
             </a:avLst>
           </a:prstGeom>
           <a:solidFill xmlns:a="http://schemas.openxmlformats.org/drawingml/2006/main">
             <a:srgbClr val="FFFFFF"/>
           </a:solidFill>
-          <a:ln xmlns:a="http://schemas.openxmlformats.org/drawingml/2006/main" w="14288">
+          <a:ln xmlns:a="http://schemas.openxmlformats.org/drawingml/2006/main" w="9525">
             <a:solidFill>
-              <a:srgbClr val="00A8D8"/>
+              <a:srgbClr val="315AA7"/>
+            </a:solidFill>
+            <a:prstDash val="solid"/>
+          </a:ln>
+        </p:spPr>
+        <p:txBody>
+          <a:bodyPr xmlns:a="http://schemas.openxmlformats.org/drawingml/2006/main" lIns="47625" tIns="9525" rIns="47625" bIns="9525" anchor="ctr">
+            <a:normAutofit fontScale="100000"/>
+          </a:bodyPr>
+          <a:lstStyle xmlns:a="http://schemas.openxmlformats.org/drawingml/2006/main"/>
+          <a:p xmlns:a="http://schemas.openxmlformats.org/drawingml/2006/main">
+            <a:pPr algn="ctr">
+              <a:defRPr sz="1200" b="0">
+                <a:solidFill>
+                  <a:srgbClr val="315AA7"/>
+                </a:solidFill>
+                <a:latin typeface="Microsoft YaHei"/>
+                <a:ea typeface="Microsoft YaHei"/>
+                <a:cs typeface="Microsoft YaHei"/>
+              </a:defRPr>
+            </a:pPr>
+            <a:r>
+              <a:rPr sz="1200" b="0">
+                <a:solidFill>
+                  <a:srgbClr val="315AA7"/>
+                </a:solidFill>
+                <a:latin typeface="Microsoft YaHei"/>
+                <a:ea typeface="Microsoft YaHei"/>
+                <a:cs typeface="Microsoft YaHei"/>
+              </a:rPr>
+              <a:t>运营决策</a:t>
+            </a:r>
+          </a:p>
+        </p:txBody>
+      </p:sp>
+      <p:sp>
+        <p:nvSpPr>
+          <p:cNvPr id="23" name="PPAGENT_QA|parent=operations-pillar-1|domains=operations-pillars">
+            <a:extLst xmlns:a="http://schemas.openxmlformats.org/drawingml/2006/main">
+              <a:ext uri="{FF2B5EF4-FFF2-40B4-BE49-F238E27FC236}">
+                <a16:creationId xmlns:a16="http://schemas.microsoft.com/office/drawing/2014/main" id="{264F12D5-0673-412D-9987-699060C235AF}"/>
+              </a:ext>
+            </a:extLst>
+          </p:cNvPr>
+          <p:cNvSpPr>
+            <a:spLocks xmlns:a="http://schemas.openxmlformats.org/drawingml/2006/main" noGrp="1"/>
+          </p:cNvSpPr>
+          <p:nvPr/>
+        </p:nvSpPr>
+        <p:spPr>
+          <a:xfrm xmlns:a="http://schemas.openxmlformats.org/drawingml/2006/main">
+            <a:off x="3409950" y="4267200"/>
+            <a:ext cx="2628900" cy="2038350"/>
+          </a:xfrm>
+          <a:prstGeom xmlns:a="http://schemas.openxmlformats.org/drawingml/2006/main" prst="roundRect">
+            <a:avLst>
+              <a:gd name="adj" fmla="val 5607"/>
+            </a:avLst>
+          </a:prstGeom>
+          <a:solidFill xmlns:a="http://schemas.openxmlformats.org/drawingml/2006/main">
+            <a:srgbClr val="F3F6F9"/>
+          </a:solidFill>
+          <a:ln xmlns:a="http://schemas.openxmlformats.org/drawingml/2006/main" w="9525">
+            <a:solidFill>
+              <a:srgbClr val="D6E0E8"/>
             </a:solidFill>
             <a:prstDash val="solid"/>
           </a:ln>
@@ -2262,28 +2452,28 @@
         <p:style>
           <a:lnRef xmlns:a="http://schemas.openxmlformats.org/drawingml/2006/main" idx="0"/>
           <a:fillRef xmlns:a="http://schemas.openxmlformats.org/drawingml/2006/main" idx="0"/>
-          <a:effectRef xmlns:a="http://schemas.openxmlformats.org/drawingml/2006/main" idx="4"/>
+          <a:effectRef xmlns:a="http://schemas.openxmlformats.org/drawingml/2006/main" idx="6"/>
           <a:fontRef xmlns:a="http://schemas.openxmlformats.org/drawingml/2006/main" idx="major"/>
         </p:style>
       </p:sp>
       <p:sp>
         <p:nvSpPr>
-          <p:cNvPr id="21" name="">
-            <a:extLst xmlns:a="http://schemas.openxmlformats.org/drawingml/2006/main">
-              <a:ext uri="{FF2B5EF4-FFF2-40B4-BE49-F238E27FC236}">
-                <a16:creationId xmlns:a16="http://schemas.microsoft.com/office/drawing/2014/main" id="{4CE55CDB-7EFE-4862-8ABF-6399F839CF30}"/>
-              </a:ext>
-            </a:extLst>
-          </p:cNvPr>
-          <p:cNvSpPr>
-            <a:spLocks xmlns:a="http://schemas.openxmlformats.org/drawingml/2006/main" noGrp="1"/>
-          </p:cNvSpPr>
-          <p:nvPr/>
-        </p:nvSpPr>
-        <p:spPr>
-          <a:xfrm xmlns:a="http://schemas.openxmlformats.org/drawingml/2006/main">
-            <a:off x="3367088" y="4305300"/>
-            <a:ext cx="2662238" cy="457200"/>
+          <p:cNvPr id="24" name="">
+            <a:extLst xmlns:a="http://schemas.openxmlformats.org/drawingml/2006/main">
+              <a:ext uri="{FF2B5EF4-FFF2-40B4-BE49-F238E27FC236}">
+                <a16:creationId xmlns:a16="http://schemas.microsoft.com/office/drawing/2014/main" id="{D710FA9C-D03C-47A8-9998-64C1C3C63A32}"/>
+              </a:ext>
+            </a:extLst>
+          </p:cNvPr>
+          <p:cNvSpPr>
+            <a:spLocks xmlns:a="http://schemas.openxmlformats.org/drawingml/2006/main" noGrp="1"/>
+          </p:cNvSpPr>
+          <p:nvPr/>
+        </p:nvSpPr>
+        <p:spPr>
+          <a:xfrm xmlns:a="http://schemas.openxmlformats.org/drawingml/2006/main">
+            <a:off x="3409950" y="4305300"/>
+            <a:ext cx="2628900" cy="457200"/>
           </a:xfrm>
           <a:prstGeom xmlns:a="http://schemas.openxmlformats.org/drawingml/2006/main" prst="roundRect">
             <a:avLst>
@@ -2291,7 +2481,7 @@
             </a:avLst>
           </a:prstGeom>
           <a:solidFill xmlns:a="http://schemas.openxmlformats.org/drawingml/2006/main">
-            <a:srgbClr val="00A8D8"/>
+            <a:srgbClr val="4C79B7"/>
           </a:solidFill>
           <a:ln xmlns:a="http://schemas.openxmlformats.org/drawingml/2006/main" w="0">
             <a:noFill/>
@@ -2330,22 +2520,22 @@
       </p:sp>
       <p:sp>
         <p:nvSpPr>
-          <p:cNvPr id="22" name="">
-            <a:extLst xmlns:a="http://schemas.openxmlformats.org/drawingml/2006/main">
-              <a:ext uri="{FF2B5EF4-FFF2-40B4-BE49-F238E27FC236}">
-                <a16:creationId xmlns:a16="http://schemas.microsoft.com/office/drawing/2014/main" id="{DEF5B064-FE4C-4627-A530-0EBC445D4AE7}"/>
-              </a:ext>
-            </a:extLst>
-          </p:cNvPr>
-          <p:cNvSpPr>
-            <a:spLocks xmlns:a="http://schemas.openxmlformats.org/drawingml/2006/main" noGrp="1"/>
-          </p:cNvSpPr>
-          <p:nvPr/>
-        </p:nvSpPr>
-        <p:spPr>
-          <a:xfrm xmlns:a="http://schemas.openxmlformats.org/drawingml/2006/main">
-            <a:off x="3538538" y="4914900"/>
-            <a:ext cx="2319338" cy="1181100"/>
+          <p:cNvPr id="25" name="">
+            <a:extLst xmlns:a="http://schemas.openxmlformats.org/drawingml/2006/main">
+              <a:ext uri="{FF2B5EF4-FFF2-40B4-BE49-F238E27FC236}">
+                <a16:creationId xmlns:a16="http://schemas.microsoft.com/office/drawing/2014/main" id="{37D06B1D-732D-426A-A8CC-693462A35CE9}"/>
+              </a:ext>
+            </a:extLst>
+          </p:cNvPr>
+          <p:cNvSpPr>
+            <a:spLocks xmlns:a="http://schemas.openxmlformats.org/drawingml/2006/main" noGrp="1"/>
+          </p:cNvSpPr>
+          <p:nvPr/>
+        </p:nvSpPr>
+        <p:spPr>
+          <a:xfrm xmlns:a="http://schemas.openxmlformats.org/drawingml/2006/main">
+            <a:off x="3543300" y="4857750"/>
+            <a:ext cx="2362200" cy="476250"/>
           </a:xfrm>
           <a:prstGeom xmlns:a="http://schemas.openxmlformats.org/drawingml/2006/main" prst="rect">
             <a:avLst/>
@@ -2362,7 +2552,7 @@
           </a:bodyPr>
           <a:lstStyle xmlns:a="http://schemas.openxmlformats.org/drawingml/2006/main"/>
           <a:p xmlns:a="http://schemas.openxmlformats.org/drawingml/2006/main">
-            <a:pPr algn="l">
+            <a:pPr algn="ctr">
               <a:defRPr sz="1200" b="0">
                 <a:solidFill>
                   <a:srgbClr val="475569"/>
@@ -2381,14 +2571,55 @@
                 <a:ea typeface="Microsoft YaHei"/>
                 <a:cs typeface="Microsoft YaHei"/>
               </a:rPr>
-              <a:t>• 过程可视</a:t>
+              <a:t>让全过程状态可追踪</a:t>
             </a:r>
           </a:p>
+        </p:txBody>
+      </p:sp>
+      <p:sp>
+        <p:nvSpPr>
+          <p:cNvPr id="26" name="">
+            <a:extLst xmlns:a="http://schemas.openxmlformats.org/drawingml/2006/main">
+              <a:ext uri="{FF2B5EF4-FFF2-40B4-BE49-F238E27FC236}">
+                <a16:creationId xmlns:a16="http://schemas.microsoft.com/office/drawing/2014/main" id="{CD508551-0029-43A5-98ED-B4E1F29D7A51}"/>
+              </a:ext>
+            </a:extLst>
+          </p:cNvPr>
+          <p:cNvSpPr>
+            <a:spLocks xmlns:a="http://schemas.openxmlformats.org/drawingml/2006/main" noGrp="1"/>
+          </p:cNvSpPr>
+          <p:nvPr/>
+        </p:nvSpPr>
+        <p:spPr>
+          <a:xfrm xmlns:a="http://schemas.openxmlformats.org/drawingml/2006/main">
+            <a:off x="3543300" y="5429250"/>
+            <a:ext cx="1152525" cy="285750"/>
+          </a:xfrm>
+          <a:prstGeom xmlns:a="http://schemas.openxmlformats.org/drawingml/2006/main" prst="roundRect">
+            <a:avLst>
+              <a:gd name="adj" fmla="val 40000"/>
+            </a:avLst>
+          </a:prstGeom>
+          <a:solidFill xmlns:a="http://schemas.openxmlformats.org/drawingml/2006/main">
+            <a:srgbClr val="FFFFFF"/>
+          </a:solidFill>
+          <a:ln xmlns:a="http://schemas.openxmlformats.org/drawingml/2006/main" w="9525">
+            <a:solidFill>
+              <a:srgbClr val="4C79B7"/>
+            </a:solidFill>
+            <a:prstDash val="solid"/>
+          </a:ln>
+        </p:spPr>
+        <p:txBody>
+          <a:bodyPr xmlns:a="http://schemas.openxmlformats.org/drawingml/2006/main" lIns="47625" tIns="9525" rIns="47625" bIns="9525" anchor="ctr">
+            <a:normAutofit fontScale="100000"/>
+          </a:bodyPr>
+          <a:lstStyle xmlns:a="http://schemas.openxmlformats.org/drawingml/2006/main"/>
           <a:p xmlns:a="http://schemas.openxmlformats.org/drawingml/2006/main">
-            <a:pPr algn="l">
+            <a:pPr algn="ctr">
               <a:defRPr sz="1200" b="0">
                 <a:solidFill>
-                  <a:srgbClr val="475569"/>
+                  <a:srgbClr val="4C79B7"/>
                 </a:solidFill>
                 <a:latin typeface="Microsoft YaHei"/>
                 <a:ea typeface="Microsoft YaHei"/>
@@ -2398,20 +2629,61 @@
             <a:r>
               <a:rPr sz="1200" b="0">
                 <a:solidFill>
-                  <a:srgbClr val="475569"/>
+                  <a:srgbClr val="4C79B7"/>
                 </a:solidFill>
                 <a:latin typeface="Microsoft YaHei"/>
                 <a:ea typeface="Microsoft YaHei"/>
                 <a:cs typeface="Microsoft YaHei"/>
               </a:rPr>
-              <a:t>• 仓储可视</a:t>
+              <a:t>过程可视</a:t>
             </a:r>
           </a:p>
+        </p:txBody>
+      </p:sp>
+      <p:sp>
+        <p:nvSpPr>
+          <p:cNvPr id="27" name="">
+            <a:extLst xmlns:a="http://schemas.openxmlformats.org/drawingml/2006/main">
+              <a:ext uri="{FF2B5EF4-FFF2-40B4-BE49-F238E27FC236}">
+                <a16:creationId xmlns:a16="http://schemas.microsoft.com/office/drawing/2014/main" id="{9FD04614-A7D8-4D3E-9E73-D8AB28D6CC22}"/>
+              </a:ext>
+            </a:extLst>
+          </p:cNvPr>
+          <p:cNvSpPr>
+            <a:spLocks xmlns:a="http://schemas.openxmlformats.org/drawingml/2006/main" noGrp="1"/>
+          </p:cNvSpPr>
+          <p:nvPr/>
+        </p:nvSpPr>
+        <p:spPr>
+          <a:xfrm xmlns:a="http://schemas.openxmlformats.org/drawingml/2006/main">
+            <a:off x="4752975" y="5429250"/>
+            <a:ext cx="1152525" cy="285750"/>
+          </a:xfrm>
+          <a:prstGeom xmlns:a="http://schemas.openxmlformats.org/drawingml/2006/main" prst="roundRect">
+            <a:avLst>
+              <a:gd name="adj" fmla="val 40000"/>
+            </a:avLst>
+          </a:prstGeom>
+          <a:solidFill xmlns:a="http://schemas.openxmlformats.org/drawingml/2006/main">
+            <a:srgbClr val="FFFFFF"/>
+          </a:solidFill>
+          <a:ln xmlns:a="http://schemas.openxmlformats.org/drawingml/2006/main" w="9525">
+            <a:solidFill>
+              <a:srgbClr val="4C79B7"/>
+            </a:solidFill>
+            <a:prstDash val="solid"/>
+          </a:ln>
+        </p:spPr>
+        <p:txBody>
+          <a:bodyPr xmlns:a="http://schemas.openxmlformats.org/drawingml/2006/main" lIns="47625" tIns="9525" rIns="47625" bIns="9525" anchor="ctr">
+            <a:normAutofit fontScale="100000"/>
+          </a:bodyPr>
+          <a:lstStyle xmlns:a="http://schemas.openxmlformats.org/drawingml/2006/main"/>
           <a:p xmlns:a="http://schemas.openxmlformats.org/drawingml/2006/main">
-            <a:pPr algn="l">
+            <a:pPr algn="ctr">
               <a:defRPr sz="1200" b="0">
                 <a:solidFill>
-                  <a:srgbClr val="475569"/>
+                  <a:srgbClr val="4C79B7"/>
                 </a:solidFill>
                 <a:latin typeface="Microsoft YaHei"/>
                 <a:ea typeface="Microsoft YaHei"/>
@@ -2421,47 +2693,111 @@
             <a:r>
               <a:rPr sz="1200" b="0">
                 <a:solidFill>
-                  <a:srgbClr val="475569"/>
+                  <a:srgbClr val="4C79B7"/>
                 </a:solidFill>
                 <a:latin typeface="Microsoft YaHei"/>
                 <a:ea typeface="Microsoft YaHei"/>
                 <a:cs typeface="Microsoft YaHei"/>
               </a:rPr>
-              <a:t>• 风险可视</a:t>
+              <a:t>仓储可视</a:t>
             </a:r>
           </a:p>
         </p:txBody>
       </p:sp>
       <p:sp>
         <p:nvSpPr>
-          <p:cNvPr id="23" name="">
-            <a:extLst xmlns:a="http://schemas.openxmlformats.org/drawingml/2006/main">
-              <a:ext uri="{FF2B5EF4-FFF2-40B4-BE49-F238E27FC236}">
-                <a16:creationId xmlns:a16="http://schemas.microsoft.com/office/drawing/2014/main" id="{71B67F4A-317C-4938-9B1B-1118DD7D18AB}"/>
-              </a:ext>
-            </a:extLst>
-          </p:cNvPr>
-          <p:cNvSpPr>
-            <a:spLocks xmlns:a="http://schemas.openxmlformats.org/drawingml/2006/main" noGrp="1"/>
-          </p:cNvSpPr>
-          <p:nvPr/>
-        </p:nvSpPr>
-        <p:spPr>
-          <a:xfrm xmlns:a="http://schemas.openxmlformats.org/drawingml/2006/main">
-            <a:off x="6162675" y="4305300"/>
-            <a:ext cx="2662238" cy="2000250"/>
+          <p:cNvPr id="28" name="">
+            <a:extLst xmlns:a="http://schemas.openxmlformats.org/drawingml/2006/main">
+              <a:ext uri="{FF2B5EF4-FFF2-40B4-BE49-F238E27FC236}">
+                <a16:creationId xmlns:a16="http://schemas.microsoft.com/office/drawing/2014/main" id="{082D5DE9-853A-4226-802C-71E067B0DECC}"/>
+              </a:ext>
+            </a:extLst>
+          </p:cNvPr>
+          <p:cNvSpPr>
+            <a:spLocks xmlns:a="http://schemas.openxmlformats.org/drawingml/2006/main" noGrp="1"/>
+          </p:cNvSpPr>
+          <p:nvPr/>
+        </p:nvSpPr>
+        <p:spPr>
+          <a:xfrm xmlns:a="http://schemas.openxmlformats.org/drawingml/2006/main">
+            <a:off x="3543300" y="5772150"/>
+            <a:ext cx="1152525" cy="285750"/>
           </a:xfrm>
           <a:prstGeom xmlns:a="http://schemas.openxmlformats.org/drawingml/2006/main" prst="roundRect">
             <a:avLst>
-              <a:gd name="adj" fmla="val 5714"/>
+              <a:gd name="adj" fmla="val 40000"/>
             </a:avLst>
           </a:prstGeom>
           <a:solidFill xmlns:a="http://schemas.openxmlformats.org/drawingml/2006/main">
             <a:srgbClr val="FFFFFF"/>
           </a:solidFill>
-          <a:ln xmlns:a="http://schemas.openxmlformats.org/drawingml/2006/main" w="14288">
+          <a:ln xmlns:a="http://schemas.openxmlformats.org/drawingml/2006/main" w="9525">
             <a:solidFill>
-              <a:srgbClr val="1677C8"/>
+              <a:srgbClr val="4C79B7"/>
+            </a:solidFill>
+            <a:prstDash val="solid"/>
+          </a:ln>
+        </p:spPr>
+        <p:txBody>
+          <a:bodyPr xmlns:a="http://schemas.openxmlformats.org/drawingml/2006/main" lIns="47625" tIns="9525" rIns="47625" bIns="9525" anchor="ctr">
+            <a:normAutofit fontScale="100000"/>
+          </a:bodyPr>
+          <a:lstStyle xmlns:a="http://schemas.openxmlformats.org/drawingml/2006/main"/>
+          <a:p xmlns:a="http://schemas.openxmlformats.org/drawingml/2006/main">
+            <a:pPr algn="ctr">
+              <a:defRPr sz="1200" b="0">
+                <a:solidFill>
+                  <a:srgbClr val="4C79B7"/>
+                </a:solidFill>
+                <a:latin typeface="Microsoft YaHei"/>
+                <a:ea typeface="Microsoft YaHei"/>
+                <a:cs typeface="Microsoft YaHei"/>
+              </a:defRPr>
+            </a:pPr>
+            <a:r>
+              <a:rPr sz="1200" b="0">
+                <a:solidFill>
+                  <a:srgbClr val="4C79B7"/>
+                </a:solidFill>
+                <a:latin typeface="Microsoft YaHei"/>
+                <a:ea typeface="Microsoft YaHei"/>
+                <a:cs typeface="Microsoft YaHei"/>
+              </a:rPr>
+              <a:t>风险可视</a:t>
+            </a:r>
+          </a:p>
+        </p:txBody>
+      </p:sp>
+      <p:sp>
+        <p:nvSpPr>
+          <p:cNvPr id="29" name="PPAGENT_QA|parent=operations-pillar-2|domains=operations-pillars">
+            <a:extLst xmlns:a="http://schemas.openxmlformats.org/drawingml/2006/main">
+              <a:ext uri="{FF2B5EF4-FFF2-40B4-BE49-F238E27FC236}">
+                <a16:creationId xmlns:a16="http://schemas.microsoft.com/office/drawing/2014/main" id="{60448076-33F7-4BA4-81F0-68A4BA0F0176}"/>
+              </a:ext>
+            </a:extLst>
+          </p:cNvPr>
+          <p:cNvSpPr>
+            <a:spLocks xmlns:a="http://schemas.openxmlformats.org/drawingml/2006/main" noGrp="1"/>
+          </p:cNvSpPr>
+          <p:nvPr/>
+        </p:nvSpPr>
+        <p:spPr>
+          <a:xfrm xmlns:a="http://schemas.openxmlformats.org/drawingml/2006/main">
+            <a:off x="6153150" y="4267200"/>
+            <a:ext cx="2628900" cy="2038350"/>
+          </a:xfrm>
+          <a:prstGeom xmlns:a="http://schemas.openxmlformats.org/drawingml/2006/main" prst="roundRect">
+            <a:avLst>
+              <a:gd name="adj" fmla="val 5607"/>
+            </a:avLst>
+          </a:prstGeom>
+          <a:solidFill xmlns:a="http://schemas.openxmlformats.org/drawingml/2006/main">
+            <a:srgbClr val="F7F9FB"/>
+          </a:solidFill>
+          <a:ln xmlns:a="http://schemas.openxmlformats.org/drawingml/2006/main" w="9525">
+            <a:solidFill>
+              <a:srgbClr val="D6E0E8"/>
             </a:solidFill>
             <a:prstDash val="solid"/>
           </a:ln>
@@ -2469,28 +2805,28 @@
         <p:style>
           <a:lnRef xmlns:a="http://schemas.openxmlformats.org/drawingml/2006/main" idx="0"/>
           <a:fillRef xmlns:a="http://schemas.openxmlformats.org/drawingml/2006/main" idx="0"/>
-          <a:effectRef xmlns:a="http://schemas.openxmlformats.org/drawingml/2006/main" idx="4"/>
+          <a:effectRef xmlns:a="http://schemas.openxmlformats.org/drawingml/2006/main" idx="6"/>
           <a:fontRef xmlns:a="http://schemas.openxmlformats.org/drawingml/2006/main" idx="major"/>
         </p:style>
       </p:sp>
       <p:sp>
         <p:nvSpPr>
-          <p:cNvPr id="24" name="">
-            <a:extLst xmlns:a="http://schemas.openxmlformats.org/drawingml/2006/main">
-              <a:ext uri="{FF2B5EF4-FFF2-40B4-BE49-F238E27FC236}">
-                <a16:creationId xmlns:a16="http://schemas.microsoft.com/office/drawing/2014/main" id="{59FA90CA-D7A7-42E2-8EC7-6B161ABB2C6B}"/>
-              </a:ext>
-            </a:extLst>
-          </p:cNvPr>
-          <p:cNvSpPr>
-            <a:spLocks xmlns:a="http://schemas.openxmlformats.org/drawingml/2006/main" noGrp="1"/>
-          </p:cNvSpPr>
-          <p:nvPr/>
-        </p:nvSpPr>
-        <p:spPr>
-          <a:xfrm xmlns:a="http://schemas.openxmlformats.org/drawingml/2006/main">
-            <a:off x="6162675" y="4305300"/>
-            <a:ext cx="2662238" cy="457200"/>
+          <p:cNvPr id="30" name="">
+            <a:extLst xmlns:a="http://schemas.openxmlformats.org/drawingml/2006/main">
+              <a:ext uri="{FF2B5EF4-FFF2-40B4-BE49-F238E27FC236}">
+                <a16:creationId xmlns:a16="http://schemas.microsoft.com/office/drawing/2014/main" id="{624F7361-515A-4007-80FF-18EA062CE008}"/>
+              </a:ext>
+            </a:extLst>
+          </p:cNvPr>
+          <p:cNvSpPr>
+            <a:spLocks xmlns:a="http://schemas.openxmlformats.org/drawingml/2006/main" noGrp="1"/>
+          </p:cNvSpPr>
+          <p:nvPr/>
+        </p:nvSpPr>
+        <p:spPr>
+          <a:xfrm xmlns:a="http://schemas.openxmlformats.org/drawingml/2006/main">
+            <a:off x="6153150" y="4305300"/>
+            <a:ext cx="2628900" cy="457200"/>
           </a:xfrm>
           <a:prstGeom xmlns:a="http://schemas.openxmlformats.org/drawingml/2006/main" prst="roundRect">
             <a:avLst>
@@ -2498,7 +2834,7 @@
             </a:avLst>
           </a:prstGeom>
           <a:solidFill xmlns:a="http://schemas.openxmlformats.org/drawingml/2006/main">
-            <a:srgbClr val="1677C8"/>
+            <a:srgbClr val="2F73B5"/>
           </a:solidFill>
           <a:ln xmlns:a="http://schemas.openxmlformats.org/drawingml/2006/main" w="0">
             <a:noFill/>
@@ -2537,22 +2873,22 @@
       </p:sp>
       <p:sp>
         <p:nvSpPr>
-          <p:cNvPr id="25" name="">
-            <a:extLst xmlns:a="http://schemas.openxmlformats.org/drawingml/2006/main">
-              <a:ext uri="{FF2B5EF4-FFF2-40B4-BE49-F238E27FC236}">
-                <a16:creationId xmlns:a16="http://schemas.microsoft.com/office/drawing/2014/main" id="{F69C6390-7ED4-453C-B26B-FC94EA36A826}"/>
-              </a:ext>
-            </a:extLst>
-          </p:cNvPr>
-          <p:cNvSpPr>
-            <a:spLocks xmlns:a="http://schemas.openxmlformats.org/drawingml/2006/main" noGrp="1"/>
-          </p:cNvSpPr>
-          <p:nvPr/>
-        </p:nvSpPr>
-        <p:spPr>
-          <a:xfrm xmlns:a="http://schemas.openxmlformats.org/drawingml/2006/main">
-            <a:off x="6334125" y="4914900"/>
-            <a:ext cx="2319338" cy="1181100"/>
+          <p:cNvPr id="31" name="">
+            <a:extLst xmlns:a="http://schemas.openxmlformats.org/drawingml/2006/main">
+              <a:ext uri="{FF2B5EF4-FFF2-40B4-BE49-F238E27FC236}">
+                <a16:creationId xmlns:a16="http://schemas.microsoft.com/office/drawing/2014/main" id="{343FF3F2-2FFB-40B3-B1BA-86C5640EADA0}"/>
+              </a:ext>
+            </a:extLst>
+          </p:cNvPr>
+          <p:cNvSpPr>
+            <a:spLocks xmlns:a="http://schemas.openxmlformats.org/drawingml/2006/main" noGrp="1"/>
+          </p:cNvSpPr>
+          <p:nvPr/>
+        </p:nvSpPr>
+        <p:spPr>
+          <a:xfrm xmlns:a="http://schemas.openxmlformats.org/drawingml/2006/main">
+            <a:off x="6286500" y="4857750"/>
+            <a:ext cx="2362200" cy="476250"/>
           </a:xfrm>
           <a:prstGeom xmlns:a="http://schemas.openxmlformats.org/drawingml/2006/main" prst="rect">
             <a:avLst/>
@@ -2569,7 +2905,7 @@
           </a:bodyPr>
           <a:lstStyle xmlns:a="http://schemas.openxmlformats.org/drawingml/2006/main"/>
           <a:p xmlns:a="http://schemas.openxmlformats.org/drawingml/2006/main">
-            <a:pPr algn="l">
+            <a:pPr algn="ctr">
               <a:defRPr sz="1200" b="0">
                 <a:solidFill>
                   <a:srgbClr val="475569"/>
@@ -2588,14 +2924,55 @@
                 <a:ea typeface="Microsoft YaHei"/>
                 <a:cs typeface="Microsoft YaHei"/>
               </a:rPr>
-              <a:t>• 协同关系</a:t>
+              <a:t>连接伙伴、资源和协同行为</a:t>
             </a:r>
           </a:p>
+        </p:txBody>
+      </p:sp>
+      <p:sp>
+        <p:nvSpPr>
+          <p:cNvPr id="32" name="">
+            <a:extLst xmlns:a="http://schemas.openxmlformats.org/drawingml/2006/main">
+              <a:ext uri="{FF2B5EF4-FFF2-40B4-BE49-F238E27FC236}">
+                <a16:creationId xmlns:a16="http://schemas.microsoft.com/office/drawing/2014/main" id="{E18DB274-AA0C-427F-BFEB-B4325E8DE68C}"/>
+              </a:ext>
+            </a:extLst>
+          </p:cNvPr>
+          <p:cNvSpPr>
+            <a:spLocks xmlns:a="http://schemas.openxmlformats.org/drawingml/2006/main" noGrp="1"/>
+          </p:cNvSpPr>
+          <p:nvPr/>
+        </p:nvSpPr>
+        <p:spPr>
+          <a:xfrm xmlns:a="http://schemas.openxmlformats.org/drawingml/2006/main">
+            <a:off x="6286500" y="5429250"/>
+            <a:ext cx="1152525" cy="285750"/>
+          </a:xfrm>
+          <a:prstGeom xmlns:a="http://schemas.openxmlformats.org/drawingml/2006/main" prst="roundRect">
+            <a:avLst>
+              <a:gd name="adj" fmla="val 40000"/>
+            </a:avLst>
+          </a:prstGeom>
+          <a:solidFill xmlns:a="http://schemas.openxmlformats.org/drawingml/2006/main">
+            <a:srgbClr val="FFFFFF"/>
+          </a:solidFill>
+          <a:ln xmlns:a="http://schemas.openxmlformats.org/drawingml/2006/main" w="9525">
+            <a:solidFill>
+              <a:srgbClr val="2F73B5"/>
+            </a:solidFill>
+            <a:prstDash val="solid"/>
+          </a:ln>
+        </p:spPr>
+        <p:txBody>
+          <a:bodyPr xmlns:a="http://schemas.openxmlformats.org/drawingml/2006/main" lIns="47625" tIns="9525" rIns="47625" bIns="9525" anchor="ctr">
+            <a:normAutofit fontScale="100000"/>
+          </a:bodyPr>
+          <a:lstStyle xmlns:a="http://schemas.openxmlformats.org/drawingml/2006/main"/>
           <a:p xmlns:a="http://schemas.openxmlformats.org/drawingml/2006/main">
-            <a:pPr algn="l">
+            <a:pPr algn="ctr">
               <a:defRPr sz="1200" b="0">
                 <a:solidFill>
-                  <a:srgbClr val="475569"/>
+                  <a:srgbClr val="2F73B5"/>
                 </a:solidFill>
                 <a:latin typeface="Microsoft YaHei"/>
                 <a:ea typeface="Microsoft YaHei"/>
@@ -2605,20 +2982,61 @@
             <a:r>
               <a:rPr sz="1200" b="0">
                 <a:solidFill>
-                  <a:srgbClr val="475569"/>
+                  <a:srgbClr val="2F73B5"/>
                 </a:solidFill>
                 <a:latin typeface="Microsoft YaHei"/>
                 <a:ea typeface="Microsoft YaHei"/>
                 <a:cs typeface="Microsoft YaHei"/>
               </a:rPr>
-              <a:t>• 资源共通</a:t>
+              <a:t>协同关系</a:t>
             </a:r>
           </a:p>
+        </p:txBody>
+      </p:sp>
+      <p:sp>
+        <p:nvSpPr>
+          <p:cNvPr id="33" name="">
+            <a:extLst xmlns:a="http://schemas.openxmlformats.org/drawingml/2006/main">
+              <a:ext uri="{FF2B5EF4-FFF2-40B4-BE49-F238E27FC236}">
+                <a16:creationId xmlns:a16="http://schemas.microsoft.com/office/drawing/2014/main" id="{6B7240B2-1F07-4A60-890A-61562CCD9ADD}"/>
+              </a:ext>
+            </a:extLst>
+          </p:cNvPr>
+          <p:cNvSpPr>
+            <a:spLocks xmlns:a="http://schemas.openxmlformats.org/drawingml/2006/main" noGrp="1"/>
+          </p:cNvSpPr>
+          <p:nvPr/>
+        </p:nvSpPr>
+        <p:spPr>
+          <a:xfrm xmlns:a="http://schemas.openxmlformats.org/drawingml/2006/main">
+            <a:off x="7496175" y="5429250"/>
+            <a:ext cx="1152525" cy="285750"/>
+          </a:xfrm>
+          <a:prstGeom xmlns:a="http://schemas.openxmlformats.org/drawingml/2006/main" prst="roundRect">
+            <a:avLst>
+              <a:gd name="adj" fmla="val 40000"/>
+            </a:avLst>
+          </a:prstGeom>
+          <a:solidFill xmlns:a="http://schemas.openxmlformats.org/drawingml/2006/main">
+            <a:srgbClr val="FFFFFF"/>
+          </a:solidFill>
+          <a:ln xmlns:a="http://schemas.openxmlformats.org/drawingml/2006/main" w="9525">
+            <a:solidFill>
+              <a:srgbClr val="2F73B5"/>
+            </a:solidFill>
+            <a:prstDash val="solid"/>
+          </a:ln>
+        </p:spPr>
+        <p:txBody>
+          <a:bodyPr xmlns:a="http://schemas.openxmlformats.org/drawingml/2006/main" lIns="47625" tIns="9525" rIns="47625" bIns="9525" anchor="ctr">
+            <a:normAutofit fontScale="100000"/>
+          </a:bodyPr>
+          <a:lstStyle xmlns:a="http://schemas.openxmlformats.org/drawingml/2006/main"/>
           <a:p xmlns:a="http://schemas.openxmlformats.org/drawingml/2006/main">
-            <a:pPr algn="l">
+            <a:pPr algn="ctr">
               <a:defRPr sz="1200" b="0">
                 <a:solidFill>
-                  <a:srgbClr val="475569"/>
+                  <a:srgbClr val="2F73B5"/>
                 </a:solidFill>
                 <a:latin typeface="Microsoft YaHei"/>
                 <a:ea typeface="Microsoft YaHei"/>
@@ -2628,47 +3046,111 @@
             <a:r>
               <a:rPr sz="1200" b="0">
                 <a:solidFill>
-                  <a:srgbClr val="475569"/>
+                  <a:srgbClr val="2F73B5"/>
                 </a:solidFill>
                 <a:latin typeface="Microsoft YaHei"/>
                 <a:ea typeface="Microsoft YaHei"/>
                 <a:cs typeface="Microsoft YaHei"/>
               </a:rPr>
-              <a:t>• 信息共享</a:t>
+              <a:t>资源共通</a:t>
             </a:r>
           </a:p>
         </p:txBody>
       </p:sp>
       <p:sp>
         <p:nvSpPr>
-          <p:cNvPr id="26" name="">
-            <a:extLst xmlns:a="http://schemas.openxmlformats.org/drawingml/2006/main">
-              <a:ext uri="{FF2B5EF4-FFF2-40B4-BE49-F238E27FC236}">
-                <a16:creationId xmlns:a16="http://schemas.microsoft.com/office/drawing/2014/main" id="{28D9CA97-FCE9-4D56-868A-AD358D3997C7}"/>
-              </a:ext>
-            </a:extLst>
-          </p:cNvPr>
-          <p:cNvSpPr>
-            <a:spLocks xmlns:a="http://schemas.openxmlformats.org/drawingml/2006/main" noGrp="1"/>
-          </p:cNvSpPr>
-          <p:nvPr/>
-        </p:nvSpPr>
-        <p:spPr>
-          <a:xfrm xmlns:a="http://schemas.openxmlformats.org/drawingml/2006/main">
-            <a:off x="8958263" y="4305300"/>
-            <a:ext cx="2662238" cy="2000250"/>
+          <p:cNvPr id="34" name="">
+            <a:extLst xmlns:a="http://schemas.openxmlformats.org/drawingml/2006/main">
+              <a:ext uri="{FF2B5EF4-FFF2-40B4-BE49-F238E27FC236}">
+                <a16:creationId xmlns:a16="http://schemas.microsoft.com/office/drawing/2014/main" id="{FCE0B283-6EE1-4B81-B04C-75CC5DE9B55E}"/>
+              </a:ext>
+            </a:extLst>
+          </p:cNvPr>
+          <p:cNvSpPr>
+            <a:spLocks xmlns:a="http://schemas.openxmlformats.org/drawingml/2006/main" noGrp="1"/>
+          </p:cNvSpPr>
+          <p:nvPr/>
+        </p:nvSpPr>
+        <p:spPr>
+          <a:xfrm xmlns:a="http://schemas.openxmlformats.org/drawingml/2006/main">
+            <a:off x="6286500" y="5772150"/>
+            <a:ext cx="1152525" cy="285750"/>
           </a:xfrm>
           <a:prstGeom xmlns:a="http://schemas.openxmlformats.org/drawingml/2006/main" prst="roundRect">
             <a:avLst>
-              <a:gd name="adj" fmla="val 5714"/>
+              <a:gd name="adj" fmla="val 40000"/>
             </a:avLst>
           </a:prstGeom>
           <a:solidFill xmlns:a="http://schemas.openxmlformats.org/drawingml/2006/main">
             <a:srgbClr val="FFFFFF"/>
           </a:solidFill>
-          <a:ln xmlns:a="http://schemas.openxmlformats.org/drawingml/2006/main" w="14288">
+          <a:ln xmlns:a="http://schemas.openxmlformats.org/drawingml/2006/main" w="9525">
             <a:solidFill>
-              <a:srgbClr val="00A8D8"/>
+              <a:srgbClr val="2F73B5"/>
+            </a:solidFill>
+            <a:prstDash val="solid"/>
+          </a:ln>
+        </p:spPr>
+        <p:txBody>
+          <a:bodyPr xmlns:a="http://schemas.openxmlformats.org/drawingml/2006/main" lIns="47625" tIns="9525" rIns="47625" bIns="9525" anchor="ctr">
+            <a:normAutofit fontScale="100000"/>
+          </a:bodyPr>
+          <a:lstStyle xmlns:a="http://schemas.openxmlformats.org/drawingml/2006/main"/>
+          <a:p xmlns:a="http://schemas.openxmlformats.org/drawingml/2006/main">
+            <a:pPr algn="ctr">
+              <a:defRPr sz="1200" b="0">
+                <a:solidFill>
+                  <a:srgbClr val="2F73B5"/>
+                </a:solidFill>
+                <a:latin typeface="Microsoft YaHei"/>
+                <a:ea typeface="Microsoft YaHei"/>
+                <a:cs typeface="Microsoft YaHei"/>
+              </a:defRPr>
+            </a:pPr>
+            <a:r>
+              <a:rPr sz="1200" b="0">
+                <a:solidFill>
+                  <a:srgbClr val="2F73B5"/>
+                </a:solidFill>
+                <a:latin typeface="Microsoft YaHei"/>
+                <a:ea typeface="Microsoft YaHei"/>
+                <a:cs typeface="Microsoft YaHei"/>
+              </a:rPr>
+              <a:t>信息共享</a:t>
+            </a:r>
+          </a:p>
+        </p:txBody>
+      </p:sp>
+      <p:sp>
+        <p:nvSpPr>
+          <p:cNvPr id="35" name="PPAGENT_QA|parent=operations-pillar-3|domains=operations-pillars">
+            <a:extLst xmlns:a="http://schemas.openxmlformats.org/drawingml/2006/main">
+              <a:ext uri="{FF2B5EF4-FFF2-40B4-BE49-F238E27FC236}">
+                <a16:creationId xmlns:a16="http://schemas.microsoft.com/office/drawing/2014/main" id="{2C3716FD-164F-46BD-8CD4-C167E4957C7D}"/>
+              </a:ext>
+            </a:extLst>
+          </p:cNvPr>
+          <p:cNvSpPr>
+            <a:spLocks xmlns:a="http://schemas.openxmlformats.org/drawingml/2006/main" noGrp="1"/>
+          </p:cNvSpPr>
+          <p:nvPr/>
+        </p:nvSpPr>
+        <p:spPr>
+          <a:xfrm xmlns:a="http://schemas.openxmlformats.org/drawingml/2006/main">
+            <a:off x="8896350" y="4267200"/>
+            <a:ext cx="2628900" cy="2038350"/>
+          </a:xfrm>
+          <a:prstGeom xmlns:a="http://schemas.openxmlformats.org/drawingml/2006/main" prst="roundRect">
+            <a:avLst>
+              <a:gd name="adj" fmla="val 5607"/>
+            </a:avLst>
+          </a:prstGeom>
+          <a:solidFill xmlns:a="http://schemas.openxmlformats.org/drawingml/2006/main">
+            <a:srgbClr val="F3F6F9"/>
+          </a:solidFill>
+          <a:ln xmlns:a="http://schemas.openxmlformats.org/drawingml/2006/main" w="9525">
+            <a:solidFill>
+              <a:srgbClr val="D6E0E8"/>
             </a:solidFill>
             <a:prstDash val="solid"/>
           </a:ln>
@@ -2676,28 +3158,28 @@
         <p:style>
           <a:lnRef xmlns:a="http://schemas.openxmlformats.org/drawingml/2006/main" idx="0"/>
           <a:fillRef xmlns:a="http://schemas.openxmlformats.org/drawingml/2006/main" idx="0"/>
-          <a:effectRef xmlns:a="http://schemas.openxmlformats.org/drawingml/2006/main" idx="4"/>
+          <a:effectRef xmlns:a="http://schemas.openxmlformats.org/drawingml/2006/main" idx="6"/>
           <a:fontRef xmlns:a="http://schemas.openxmlformats.org/drawingml/2006/main" idx="major"/>
         </p:style>
       </p:sp>
       <p:sp>
         <p:nvSpPr>
-          <p:cNvPr id="27" name="">
-            <a:extLst xmlns:a="http://schemas.openxmlformats.org/drawingml/2006/main">
-              <a:ext uri="{FF2B5EF4-FFF2-40B4-BE49-F238E27FC236}">
-                <a16:creationId xmlns:a16="http://schemas.microsoft.com/office/drawing/2014/main" id="{8327CEA5-EADC-4813-BC96-0D169E40D382}"/>
-              </a:ext>
-            </a:extLst>
-          </p:cNvPr>
-          <p:cNvSpPr>
-            <a:spLocks xmlns:a="http://schemas.openxmlformats.org/drawingml/2006/main" noGrp="1"/>
-          </p:cNvSpPr>
-          <p:nvPr/>
-        </p:nvSpPr>
-        <p:spPr>
-          <a:xfrm xmlns:a="http://schemas.openxmlformats.org/drawingml/2006/main">
-            <a:off x="8958263" y="4305300"/>
-            <a:ext cx="2662238" cy="457200"/>
+          <p:cNvPr id="36" name="">
+            <a:extLst xmlns:a="http://schemas.openxmlformats.org/drawingml/2006/main">
+              <a:ext uri="{FF2B5EF4-FFF2-40B4-BE49-F238E27FC236}">
+                <a16:creationId xmlns:a16="http://schemas.microsoft.com/office/drawing/2014/main" id="{CF0C68CE-17ED-4EBD-9A7A-0B75E7B64A9B}"/>
+              </a:ext>
+            </a:extLst>
+          </p:cNvPr>
+          <p:cNvSpPr>
+            <a:spLocks xmlns:a="http://schemas.openxmlformats.org/drawingml/2006/main" noGrp="1"/>
+          </p:cNvSpPr>
+          <p:nvPr/>
+        </p:nvSpPr>
+        <p:spPr>
+          <a:xfrm xmlns:a="http://schemas.openxmlformats.org/drawingml/2006/main">
+            <a:off x="8896350" y="4305300"/>
+            <a:ext cx="2628900" cy="457200"/>
           </a:xfrm>
           <a:prstGeom xmlns:a="http://schemas.openxmlformats.org/drawingml/2006/main" prst="roundRect">
             <a:avLst>
@@ -2705,7 +3187,7 @@
             </a:avLst>
           </a:prstGeom>
           <a:solidFill xmlns:a="http://schemas.openxmlformats.org/drawingml/2006/main">
-            <a:srgbClr val="00A8D8"/>
+            <a:srgbClr val="5D91CD"/>
           </a:solidFill>
           <a:ln xmlns:a="http://schemas.openxmlformats.org/drawingml/2006/main" w="0">
             <a:noFill/>
@@ -2744,22 +3226,22 @@
       </p:sp>
       <p:sp>
         <p:nvSpPr>
-          <p:cNvPr id="28" name="">
-            <a:extLst xmlns:a="http://schemas.openxmlformats.org/drawingml/2006/main">
-              <a:ext uri="{FF2B5EF4-FFF2-40B4-BE49-F238E27FC236}">
-                <a16:creationId xmlns:a16="http://schemas.microsoft.com/office/drawing/2014/main" id="{9843060F-388F-4F6F-8E62-5BA46413285B}"/>
-              </a:ext>
-            </a:extLst>
-          </p:cNvPr>
-          <p:cNvSpPr>
-            <a:spLocks xmlns:a="http://schemas.openxmlformats.org/drawingml/2006/main" noGrp="1"/>
-          </p:cNvSpPr>
-          <p:nvPr/>
-        </p:nvSpPr>
-        <p:spPr>
-          <a:xfrm xmlns:a="http://schemas.openxmlformats.org/drawingml/2006/main">
-            <a:off x="9129713" y="4914900"/>
-            <a:ext cx="2319338" cy="1181100"/>
+          <p:cNvPr id="37" name="">
+            <a:extLst xmlns:a="http://schemas.openxmlformats.org/drawingml/2006/main">
+              <a:ext uri="{FF2B5EF4-FFF2-40B4-BE49-F238E27FC236}">
+                <a16:creationId xmlns:a16="http://schemas.microsoft.com/office/drawing/2014/main" id="{662DEFC5-F5B1-4CF9-8729-5A2E09311801}"/>
+              </a:ext>
+            </a:extLst>
+          </p:cNvPr>
+          <p:cNvSpPr>
+            <a:spLocks xmlns:a="http://schemas.openxmlformats.org/drawingml/2006/main" noGrp="1"/>
+          </p:cNvSpPr>
+          <p:nvPr/>
+        </p:nvSpPr>
+        <p:spPr>
+          <a:xfrm xmlns:a="http://schemas.openxmlformats.org/drawingml/2006/main">
+            <a:off x="9029700" y="4857750"/>
+            <a:ext cx="2362200" cy="476250"/>
           </a:xfrm>
           <a:prstGeom xmlns:a="http://schemas.openxmlformats.org/drawingml/2006/main" prst="rect">
             <a:avLst/>
@@ -2776,7 +3258,7 @@
           </a:bodyPr>
           <a:lstStyle xmlns:a="http://schemas.openxmlformats.org/drawingml/2006/main"/>
           <a:p xmlns:a="http://schemas.openxmlformats.org/drawingml/2006/main">
-            <a:pPr algn="l">
+            <a:pPr algn="ctr">
               <a:defRPr sz="1200" b="0">
                 <a:solidFill>
                   <a:srgbClr val="475569"/>
@@ -2795,14 +3277,55 @@
                 <a:ea typeface="Microsoft YaHei"/>
                 <a:cs typeface="Microsoft YaHei"/>
               </a:rPr>
-              <a:t>• 价值管理</a:t>
+              <a:t>整合业务要素形成闭环</a:t>
             </a:r>
           </a:p>
+        </p:txBody>
+      </p:sp>
+      <p:sp>
+        <p:nvSpPr>
+          <p:cNvPr id="38" name="">
+            <a:extLst xmlns:a="http://schemas.openxmlformats.org/drawingml/2006/main">
+              <a:ext uri="{FF2B5EF4-FFF2-40B4-BE49-F238E27FC236}">
+                <a16:creationId xmlns:a16="http://schemas.microsoft.com/office/drawing/2014/main" id="{AACFF995-2DF6-42A8-BF16-EBB9DA477524}"/>
+              </a:ext>
+            </a:extLst>
+          </p:cNvPr>
+          <p:cNvSpPr>
+            <a:spLocks xmlns:a="http://schemas.openxmlformats.org/drawingml/2006/main" noGrp="1"/>
+          </p:cNvSpPr>
+          <p:nvPr/>
+        </p:nvSpPr>
+        <p:spPr>
+          <a:xfrm xmlns:a="http://schemas.openxmlformats.org/drawingml/2006/main">
+            <a:off x="9029700" y="5429250"/>
+            <a:ext cx="1152525" cy="285750"/>
+          </a:xfrm>
+          <a:prstGeom xmlns:a="http://schemas.openxmlformats.org/drawingml/2006/main" prst="roundRect">
+            <a:avLst>
+              <a:gd name="adj" fmla="val 40000"/>
+            </a:avLst>
+          </a:prstGeom>
+          <a:solidFill xmlns:a="http://schemas.openxmlformats.org/drawingml/2006/main">
+            <a:srgbClr val="FFFFFF"/>
+          </a:solidFill>
+          <a:ln xmlns:a="http://schemas.openxmlformats.org/drawingml/2006/main" w="9525">
+            <a:solidFill>
+              <a:srgbClr val="5D91CD"/>
+            </a:solidFill>
+            <a:prstDash val="solid"/>
+          </a:ln>
+        </p:spPr>
+        <p:txBody>
+          <a:bodyPr xmlns:a="http://schemas.openxmlformats.org/drawingml/2006/main" lIns="47625" tIns="9525" rIns="47625" bIns="9525" anchor="ctr">
+            <a:normAutofit fontScale="100000"/>
+          </a:bodyPr>
+          <a:lstStyle xmlns:a="http://schemas.openxmlformats.org/drawingml/2006/main"/>
           <a:p xmlns:a="http://schemas.openxmlformats.org/drawingml/2006/main">
-            <a:pPr algn="l">
+            <a:pPr algn="ctr">
               <a:defRPr sz="1200" b="0">
                 <a:solidFill>
-                  <a:srgbClr val="475569"/>
+                  <a:srgbClr val="5D91CD"/>
                 </a:solidFill>
                 <a:latin typeface="Microsoft YaHei"/>
                 <a:ea typeface="Microsoft YaHei"/>
@@ -2812,20 +3335,61 @@
             <a:r>
               <a:rPr sz="1200" b="0">
                 <a:solidFill>
-                  <a:srgbClr val="475569"/>
+                  <a:srgbClr val="5D91CD"/>
                 </a:solidFill>
                 <a:latin typeface="Microsoft YaHei"/>
                 <a:ea typeface="Microsoft YaHei"/>
                 <a:cs typeface="Microsoft YaHei"/>
               </a:rPr>
-              <a:t>• 生产管理</a:t>
+              <a:t>价值管理</a:t>
             </a:r>
           </a:p>
+        </p:txBody>
+      </p:sp>
+      <p:sp>
+        <p:nvSpPr>
+          <p:cNvPr id="39" name="">
+            <a:extLst xmlns:a="http://schemas.openxmlformats.org/drawingml/2006/main">
+              <a:ext uri="{FF2B5EF4-FFF2-40B4-BE49-F238E27FC236}">
+                <a16:creationId xmlns:a16="http://schemas.microsoft.com/office/drawing/2014/main" id="{7A44F296-0612-4717-A951-1059954F9BF4}"/>
+              </a:ext>
+            </a:extLst>
+          </p:cNvPr>
+          <p:cNvSpPr>
+            <a:spLocks xmlns:a="http://schemas.openxmlformats.org/drawingml/2006/main" noGrp="1"/>
+          </p:cNvSpPr>
+          <p:nvPr/>
+        </p:nvSpPr>
+        <p:spPr>
+          <a:xfrm xmlns:a="http://schemas.openxmlformats.org/drawingml/2006/main">
+            <a:off x="10239375" y="5429250"/>
+            <a:ext cx="1152525" cy="285750"/>
+          </a:xfrm>
+          <a:prstGeom xmlns:a="http://schemas.openxmlformats.org/drawingml/2006/main" prst="roundRect">
+            <a:avLst>
+              <a:gd name="adj" fmla="val 40000"/>
+            </a:avLst>
+          </a:prstGeom>
+          <a:solidFill xmlns:a="http://schemas.openxmlformats.org/drawingml/2006/main">
+            <a:srgbClr val="FFFFFF"/>
+          </a:solidFill>
+          <a:ln xmlns:a="http://schemas.openxmlformats.org/drawingml/2006/main" w="9525">
+            <a:solidFill>
+              <a:srgbClr val="5D91CD"/>
+            </a:solidFill>
+            <a:prstDash val="solid"/>
+          </a:ln>
+        </p:spPr>
+        <p:txBody>
+          <a:bodyPr xmlns:a="http://schemas.openxmlformats.org/drawingml/2006/main" lIns="47625" tIns="9525" rIns="47625" bIns="9525" anchor="ctr">
+            <a:normAutofit fontScale="100000"/>
+          </a:bodyPr>
+          <a:lstStyle xmlns:a="http://schemas.openxmlformats.org/drawingml/2006/main"/>
           <a:p xmlns:a="http://schemas.openxmlformats.org/drawingml/2006/main">
-            <a:pPr algn="l">
+            <a:pPr algn="ctr">
               <a:defRPr sz="1200" b="0">
                 <a:solidFill>
-                  <a:srgbClr val="475569"/>
+                  <a:srgbClr val="5D91CD"/>
                 </a:solidFill>
                 <a:latin typeface="Microsoft YaHei"/>
                 <a:ea typeface="Microsoft YaHei"/>
@@ -2835,13 +3399,77 @@
             <a:r>
               <a:rPr sz="1200" b="0">
                 <a:solidFill>
-                  <a:srgbClr val="475569"/>
+                  <a:srgbClr val="5D91CD"/>
                 </a:solidFill>
                 <a:latin typeface="Microsoft YaHei"/>
                 <a:ea typeface="Microsoft YaHei"/>
                 <a:cs typeface="Microsoft YaHei"/>
               </a:rPr>
-              <a:t>• 风险管理</a:t>
+              <a:t>生产管理</a:t>
+            </a:r>
+          </a:p>
+        </p:txBody>
+      </p:sp>
+      <p:sp>
+        <p:nvSpPr>
+          <p:cNvPr id="40" name="">
+            <a:extLst xmlns:a="http://schemas.openxmlformats.org/drawingml/2006/main">
+              <a:ext uri="{FF2B5EF4-FFF2-40B4-BE49-F238E27FC236}">
+                <a16:creationId xmlns:a16="http://schemas.microsoft.com/office/drawing/2014/main" id="{579D4CF8-8999-474E-AD5D-9CB4CCAF9258}"/>
+              </a:ext>
+            </a:extLst>
+          </p:cNvPr>
+          <p:cNvSpPr>
+            <a:spLocks xmlns:a="http://schemas.openxmlformats.org/drawingml/2006/main" noGrp="1"/>
+          </p:cNvSpPr>
+          <p:nvPr/>
+        </p:nvSpPr>
+        <p:spPr>
+          <a:xfrm xmlns:a="http://schemas.openxmlformats.org/drawingml/2006/main">
+            <a:off x="9029700" y="5772150"/>
+            <a:ext cx="1152525" cy="285750"/>
+          </a:xfrm>
+          <a:prstGeom xmlns:a="http://schemas.openxmlformats.org/drawingml/2006/main" prst="roundRect">
+            <a:avLst>
+              <a:gd name="adj" fmla="val 40000"/>
+            </a:avLst>
+          </a:prstGeom>
+          <a:solidFill xmlns:a="http://schemas.openxmlformats.org/drawingml/2006/main">
+            <a:srgbClr val="FFFFFF"/>
+          </a:solidFill>
+          <a:ln xmlns:a="http://schemas.openxmlformats.org/drawingml/2006/main" w="9525">
+            <a:solidFill>
+              <a:srgbClr val="5D91CD"/>
+            </a:solidFill>
+            <a:prstDash val="solid"/>
+          </a:ln>
+        </p:spPr>
+        <p:txBody>
+          <a:bodyPr xmlns:a="http://schemas.openxmlformats.org/drawingml/2006/main" lIns="47625" tIns="9525" rIns="47625" bIns="9525" anchor="ctr">
+            <a:normAutofit fontScale="100000"/>
+          </a:bodyPr>
+          <a:lstStyle xmlns:a="http://schemas.openxmlformats.org/drawingml/2006/main"/>
+          <a:p xmlns:a="http://schemas.openxmlformats.org/drawingml/2006/main">
+            <a:pPr algn="ctr">
+              <a:defRPr sz="1200" b="0">
+                <a:solidFill>
+                  <a:srgbClr val="5D91CD"/>
+                </a:solidFill>
+                <a:latin typeface="Microsoft YaHei"/>
+                <a:ea typeface="Microsoft YaHei"/>
+                <a:cs typeface="Microsoft YaHei"/>
+              </a:defRPr>
+            </a:pPr>
+            <a:r>
+              <a:rPr sz="1200" b="0">
+                <a:solidFill>
+                  <a:srgbClr val="5D91CD"/>
+                </a:solidFill>
+                <a:latin typeface="Microsoft YaHei"/>
+                <a:ea typeface="Microsoft YaHei"/>
+                <a:cs typeface="Microsoft YaHei"/>
+              </a:rPr>
+              <a:t>风险管理</a:t>
             </a:r>
           </a:p>
         </p:txBody>
@@ -2849,7 +3477,7 @@
     </p:spTree>
     <p:extLst>
       <p:ext uri="{BB962C8B-B14F-4D97-AF65-F5344CB8AC3E}">
-        <p14:creationId xmlns:p14="http://schemas.microsoft.com/office/powerpoint/2010/main" val="1233221779"/>
+        <p14:creationId xmlns:p14="http://schemas.microsoft.com/office/powerpoint/2010/main" val="1924043847"/>
       </p:ext>
     </p:extLst>
   </p:cSld>
